--- a/public/retrieval-roll-and-retrieve-template.pptx
+++ b/public/retrieval-roll-and-retrieve-template.pptx
@@ -2,13 +2,13 @@
 <file path=ppt/presentation.xml><?xml version="1.0" encoding="utf-8"?>
 <p:presentation xmlns:p="http://schemas.openxmlformats.org/presentationml/2006/main">
   <p:sldMasterIdLst>
-    <p:sldMasterId xmlns:r="http://schemas.openxmlformats.org/officeDocument/2006/relationships" id="2147483648" r:id="R2a5c81c2d97e4500"/>
+    <p:sldMasterId xmlns:r="http://schemas.openxmlformats.org/officeDocument/2006/relationships" id="2147483648" r:id="R773a069ef9994cd8"/>
   </p:sldMasterIdLst>
   <p:notesMasterIdLst>
-    <p:notesMasterId xmlns:r="http://schemas.openxmlformats.org/officeDocument/2006/relationships" r:id="R386ed5be560c4750"/>
+    <p:notesMasterId xmlns:r="http://schemas.openxmlformats.org/officeDocument/2006/relationships" r:id="Rdbda96b1edc841ea"/>
   </p:notesMasterIdLst>
   <p:sldIdLst>
-    <p:sldId xmlns:r="http://schemas.openxmlformats.org/officeDocument/2006/relationships" id="256" r:id="R9184df81f2f142df"/>
+    <p:sldId xmlns:r="http://schemas.openxmlformats.org/officeDocument/2006/relationships" id="256" r:id="R836eee1c990c4b71"/>
   </p:sldIdLst>
   <p:sldSz cx="12192000" cy="6858000"/>
   <p:notesSz cx="6858000" cy="9144000"/>
@@ -442,7 +442,7 @@
           <a:lstStyle xmlns:a="http://schemas.openxmlformats.org/drawingml/2006/main"/>
           <a:p xmlns:a="http://schemas.openxmlformats.org/drawingml/2006/main">
             <a:r>
-              <a:t>Teacher setup: Replace bracketed text before teaching. Every text box is editable. Duplicate the slide for checked answers or a second prompt. Keep prompt and answer sides separate when printing cards.</a:t>
+              <a:t>Teacher setup: Replace bracketed text before teaching. All text and shapes are editable. Duplicate the slide for answers or another prompt. For card activities, separate prompt and answer sides before printing.</a:t>
             </a:r>
           </a:p>
           <a:p xmlns:a="http://schemas.openxmlformats.org/drawingml/2006/main">
@@ -452,17 +452,12 @@
           </a:p>
           <a:p xmlns:a="http://schemas.openxmlformats.org/drawingml/2006/main">
             <a:r>
-              <a:t>Activity: Roll and retrieve</a:t>
-            </a:r>
-          </a:p>
-          <a:p xmlns:a="http://schemas.openxmlformats.org/drawingml/2006/main">
-            <a:r>
               <a:t>Materials: A die, six of your own prompts and checked answers</a:t>
             </a:r>
           </a:p>
           <a:p xmlns:a="http://schemas.openxmlformats.org/drawingml/2006/main">
             <a:r>
-              <a:t>Suggested total time including feedback: 8 minutes.</a:t>
+              <a:t>Suggested time including feedback: 8 minutes.</a:t>
             </a:r>
           </a:p>
           <a:p xmlns:a="http://schemas.openxmlformats.org/drawingml/2006/main">
@@ -505,26 +500,6 @@
               <a:t>Adapt: Use a fixed sequence when randomness leaves gaps, and avoid rewarding speed.</a:t>
             </a:r>
           </a:p>
-          <a:p xmlns:a="http://schemas.openxmlformats.org/drawingml/2006/main">
-            <a:r>
-              <a:t>Credit: Shared dice-selection format; TNT classroom adaptation</a:t>
-            </a:r>
-          </a:p>
-          <a:p xmlns:a="http://schemas.openxmlformats.org/drawingml/2006/main">
-            <a:r>
-              <a:t>No sole creator is verified for this generic dice format. Random selection changes the format; learning depends on retrieval and feedback.</a:t>
-            </a:r>
-          </a:p>
-          <a:p xmlns:a="http://schemas.openxmlformats.org/drawingml/2006/main">
-            <a:r>
-              <a:t>Source: https://pdf.retrievalpractice.org/RetrievalPracticeGuide.pdf</a:t>
-            </a:r>
-          </a:p>
-          <a:p xmlns:a="http://schemas.openxmlformats.org/drawingml/2006/main">
-            <a:r>
-              <a:t>Full guide: https://tnt-teaching-tools.github.io/cold-call-classroom/retrieval-roll-and-retrieve.html</a:t>
-            </a:r>
-          </a:p>
         </p:txBody>
       </p:sp>
       <p:sp>
@@ -569,7 +544,7 @@
           <p:cNvPr id="4" name="Accent rule">
             <a:extLst xmlns:a="http://schemas.openxmlformats.org/drawingml/2006/main">
               <a:ext uri="{FF2B5EF4-FFF2-40B4-BE49-F238E27FC236}">
-                <a16:creationId xmlns:a16="http://schemas.microsoft.com/office/drawing/2014/main" id="{229CD8A3-229B-4A41-AA83-0BC52A1AE24C}"/>
+                <a16:creationId xmlns:a16="http://schemas.microsoft.com/office/drawing/2014/main" id="{5F0D234B-9388-470E-9223-56D945F11B34}"/>
               </a:ext>
             </a:extLst>
           </p:cNvPr>
@@ -600,7 +575,7 @@
           <p:cNvPr id="2" name="Title">
             <a:extLst xmlns:a="http://schemas.openxmlformats.org/drawingml/2006/main">
               <a:ext uri="{FF2B5EF4-FFF2-40B4-BE49-F238E27FC236}">
-                <a16:creationId xmlns:a16="http://schemas.microsoft.com/office/drawing/2014/main" id="{3DE8F942-ED3A-4120-8975-3ED8D5F5DF22}"/>
+                <a16:creationId xmlns:a16="http://schemas.microsoft.com/office/drawing/2014/main" id="{CFF1DF8F-20FF-4D80-BDA7-9F0DC28432D5}"/>
               </a:ext>
             </a:extLst>
           </p:cNvPr>
@@ -747,7 +722,7 @@
           <p:cNvPr id="3" name="Subtitle">
             <a:extLst xmlns:a="http://schemas.openxmlformats.org/drawingml/2006/main">
               <a:ext uri="{FF2B5EF4-FFF2-40B4-BE49-F238E27FC236}">
-                <a16:creationId xmlns:a16="http://schemas.microsoft.com/office/drawing/2014/main" id="{C1D4C6DE-B30D-49A7-A749-791EE4AFDA75}"/>
+                <a16:creationId xmlns:a16="http://schemas.microsoft.com/office/drawing/2014/main" id="{25CE490B-486D-4D03-85B2-9BB2EBC2EC3F}"/>
               </a:ext>
             </a:extLst>
           </p:cNvPr>
@@ -911,7 +886,7 @@
           <p:cNvPr id="3" name="Accent rule">
             <a:extLst xmlns:a="http://schemas.openxmlformats.org/drawingml/2006/main">
               <a:ext uri="{FF2B5EF4-FFF2-40B4-BE49-F238E27FC236}">
-                <a16:creationId xmlns:a16="http://schemas.microsoft.com/office/drawing/2014/main" id="{59099719-A568-4A38-8030-42B24E7D627E}"/>
+                <a16:creationId xmlns:a16="http://schemas.microsoft.com/office/drawing/2014/main" id="{11768CD3-BDEB-4874-9D4B-C583407B2856}"/>
               </a:ext>
             </a:extLst>
           </p:cNvPr>
@@ -942,7 +917,7 @@
           <p:cNvPr id="2" name="Section title">
             <a:extLst xmlns:a="http://schemas.openxmlformats.org/drawingml/2006/main">
               <a:ext uri="{FF2B5EF4-FFF2-40B4-BE49-F238E27FC236}">
-                <a16:creationId xmlns:a16="http://schemas.microsoft.com/office/drawing/2014/main" id="{B2DF7109-4565-4FE4-BB85-ED0FDC350B09}"/>
+                <a16:creationId xmlns:a16="http://schemas.microsoft.com/office/drawing/2014/main" id="{898A2003-3BA1-4A4D-870B-E412C9B775AD}"/>
               </a:ext>
             </a:extLst>
           </p:cNvPr>
@@ -1106,7 +1081,7 @@
           <p:cNvPr id="4" name="Accent rule">
             <a:extLst xmlns:a="http://schemas.openxmlformats.org/drawingml/2006/main">
               <a:ext uri="{FF2B5EF4-FFF2-40B4-BE49-F238E27FC236}">
-                <a16:creationId xmlns:a16="http://schemas.microsoft.com/office/drawing/2014/main" id="{9CC38780-B590-4CAF-8EF1-AE336800A2B1}"/>
+                <a16:creationId xmlns:a16="http://schemas.microsoft.com/office/drawing/2014/main" id="{AEC73336-45F6-47FB-9EB7-B8010D93B698}"/>
               </a:ext>
             </a:extLst>
           </p:cNvPr>
@@ -1137,7 +1112,7 @@
           <p:cNvPr id="2" name="Title">
             <a:extLst xmlns:a="http://schemas.openxmlformats.org/drawingml/2006/main">
               <a:ext uri="{FF2B5EF4-FFF2-40B4-BE49-F238E27FC236}">
-                <a16:creationId xmlns:a16="http://schemas.microsoft.com/office/drawing/2014/main" id="{51BA6FC3-5C54-4E00-A1B2-0BE7F13BA971}"/>
+                <a16:creationId xmlns:a16="http://schemas.microsoft.com/office/drawing/2014/main" id="{9A447BE4-8965-4262-A82D-275A48B0F51E}"/>
               </a:ext>
             </a:extLst>
           </p:cNvPr>
@@ -1284,7 +1259,7 @@
           <p:cNvPr id="3" name="Body">
             <a:extLst xmlns:a="http://schemas.openxmlformats.org/drawingml/2006/main">
               <a:ext uri="{FF2B5EF4-FFF2-40B4-BE49-F238E27FC236}">
-                <a16:creationId xmlns:a16="http://schemas.microsoft.com/office/drawing/2014/main" id="{37DFBEBA-FAA0-42E3-AFC7-9CB5D683A076}"/>
+                <a16:creationId xmlns:a16="http://schemas.microsoft.com/office/drawing/2014/main" id="{23DBBD79-D675-4155-866D-12AD30480A85}"/>
               </a:ext>
             </a:extLst>
           </p:cNvPr>
@@ -1448,7 +1423,7 @@
           <p:cNvPr id="5" name="Accent rule">
             <a:extLst xmlns:a="http://schemas.openxmlformats.org/drawingml/2006/main">
               <a:ext uri="{FF2B5EF4-FFF2-40B4-BE49-F238E27FC236}">
-                <a16:creationId xmlns:a16="http://schemas.microsoft.com/office/drawing/2014/main" id="{DAD3647C-3560-4CA3-BC71-73BAFB27A78A}"/>
+                <a16:creationId xmlns:a16="http://schemas.microsoft.com/office/drawing/2014/main" id="{9DCD314F-5683-453F-880D-72E0CB3B2284}"/>
               </a:ext>
             </a:extLst>
           </p:cNvPr>
@@ -1479,7 +1454,7 @@
           <p:cNvPr id="2" name="Title">
             <a:extLst xmlns:a="http://schemas.openxmlformats.org/drawingml/2006/main">
               <a:ext uri="{FF2B5EF4-FFF2-40B4-BE49-F238E27FC236}">
-                <a16:creationId xmlns:a16="http://schemas.microsoft.com/office/drawing/2014/main" id="{1E58FF40-008B-40ED-90B4-B1BD1290757E}"/>
+                <a16:creationId xmlns:a16="http://schemas.microsoft.com/office/drawing/2014/main" id="{B14A6987-BC11-4179-B5B2-79EF23F297D3}"/>
               </a:ext>
             </a:extLst>
           </p:cNvPr>
@@ -1626,7 +1601,7 @@
           <p:cNvPr id="3" name="Left column">
             <a:extLst xmlns:a="http://schemas.openxmlformats.org/drawingml/2006/main">
               <a:ext uri="{FF2B5EF4-FFF2-40B4-BE49-F238E27FC236}">
-                <a16:creationId xmlns:a16="http://schemas.microsoft.com/office/drawing/2014/main" id="{0EF17E39-703E-450B-8CB4-8E6C61602C29}"/>
+                <a16:creationId xmlns:a16="http://schemas.microsoft.com/office/drawing/2014/main" id="{A7EF20F0-B778-421D-A87D-68FFBDD058CD}"/>
               </a:ext>
             </a:extLst>
           </p:cNvPr>
@@ -1773,7 +1748,7 @@
           <p:cNvPr id="4" name="Right column">
             <a:extLst xmlns:a="http://schemas.openxmlformats.org/drawingml/2006/main">
               <a:ext uri="{FF2B5EF4-FFF2-40B4-BE49-F238E27FC236}">
-                <a16:creationId xmlns:a16="http://schemas.microsoft.com/office/drawing/2014/main" id="{5197E1D8-E8A5-430F-8E5F-33F7731B8AA2}"/>
+                <a16:creationId xmlns:a16="http://schemas.microsoft.com/office/drawing/2014/main" id="{491EC2B5-DE14-4199-A475-7440699AE67E}"/>
               </a:ext>
             </a:extLst>
           </p:cNvPr>
@@ -1937,7 +1912,7 @@
           <p:cNvPr id="4" name="Accent rule">
             <a:extLst xmlns:a="http://schemas.openxmlformats.org/drawingml/2006/main">
               <a:ext uri="{FF2B5EF4-FFF2-40B4-BE49-F238E27FC236}">
-                <a16:creationId xmlns:a16="http://schemas.microsoft.com/office/drawing/2014/main" id="{73869923-35DA-4930-95B0-11A53619A0D5}"/>
+                <a16:creationId xmlns:a16="http://schemas.microsoft.com/office/drawing/2014/main" id="{63882EF0-E7C6-439C-B6DE-BCB67D1990DE}"/>
               </a:ext>
             </a:extLst>
           </p:cNvPr>
@@ -1968,7 +1943,7 @@
           <p:cNvPr id="2" name="Title">
             <a:extLst xmlns:a="http://schemas.openxmlformats.org/drawingml/2006/main">
               <a:ext uri="{FF2B5EF4-FFF2-40B4-BE49-F238E27FC236}">
-                <a16:creationId xmlns:a16="http://schemas.microsoft.com/office/drawing/2014/main" id="{74891CF0-1535-4B00-B8F9-1BE22E914DAB}"/>
+                <a16:creationId xmlns:a16="http://schemas.microsoft.com/office/drawing/2014/main" id="{A934DDF2-EB74-465A-9DE7-BF599D66CF50}"/>
               </a:ext>
             </a:extLst>
           </p:cNvPr>
@@ -2115,7 +2090,7 @@
           <p:cNvPr id="3" name="Left column">
             <a:extLst xmlns:a="http://schemas.openxmlformats.org/drawingml/2006/main">
               <a:ext uri="{FF2B5EF4-FFF2-40B4-BE49-F238E27FC236}">
-                <a16:creationId xmlns:a16="http://schemas.microsoft.com/office/drawing/2014/main" id="{BC4E6A38-ABE4-4508-916F-6B4663539D28}"/>
+                <a16:creationId xmlns:a16="http://schemas.microsoft.com/office/drawing/2014/main" id="{B120E5C8-280B-4F20-BC5E-83E040F03A2E}"/>
               </a:ext>
             </a:extLst>
           </p:cNvPr>
@@ -2300,12 +2275,12 @@
   </p:cSld>
   <p:clrMap bg1="lt1" tx1="dk1" bg2="lt2" tx2="dk2" accent1="accent1" accent2="accent2" accent3="accent3" accent4="accent4" accent5="accent5" accent6="accent6" hlink="hlink" folHlink="folHlink"/>
   <p:sldLayoutIdLst>
-    <p:sldLayoutId xmlns:r="http://schemas.openxmlformats.org/officeDocument/2006/relationships" id="2147483649" r:id="R7cb2a356ea004460"/>
-    <p:sldLayoutId xmlns:r="http://schemas.openxmlformats.org/officeDocument/2006/relationships" id="2147483650" r:id="R450e2193275f4183"/>
-    <p:sldLayoutId xmlns:r="http://schemas.openxmlformats.org/officeDocument/2006/relationships" id="2147483651" r:id="R8302febab46147ac"/>
-    <p:sldLayoutId xmlns:r="http://schemas.openxmlformats.org/officeDocument/2006/relationships" id="2147483652" r:id="R3e3c53eaff0441a4"/>
-    <p:sldLayoutId xmlns:r="http://schemas.openxmlformats.org/officeDocument/2006/relationships" id="2147483653" r:id="R41e9971ec5d04dc3"/>
-    <p:sldLayoutId xmlns:r="http://schemas.openxmlformats.org/officeDocument/2006/relationships" id="2147483654" r:id="R96aba081dec54de3"/>
+    <p:sldLayoutId xmlns:r="http://schemas.openxmlformats.org/officeDocument/2006/relationships" id="2147483649" r:id="R487774e980bf4090"/>
+    <p:sldLayoutId xmlns:r="http://schemas.openxmlformats.org/officeDocument/2006/relationships" id="2147483650" r:id="Rc1f02c89bd844b83"/>
+    <p:sldLayoutId xmlns:r="http://schemas.openxmlformats.org/officeDocument/2006/relationships" id="2147483651" r:id="R8e5ae5b1e6f04890"/>
+    <p:sldLayoutId xmlns:r="http://schemas.openxmlformats.org/officeDocument/2006/relationships" id="2147483652" r:id="R46f0c0b9abda4286"/>
+    <p:sldLayoutId xmlns:r="http://schemas.openxmlformats.org/officeDocument/2006/relationships" id="2147483653" r:id="R0215a857624c4e98"/>
+    <p:sldLayoutId xmlns:r="http://schemas.openxmlformats.org/officeDocument/2006/relationships" id="2147483654" r:id="R536e1f6afb624faa"/>
   </p:sldLayoutIdLst>
   <p:txStyles>
     <p:titleStyle>
@@ -2838,7 +2813,7 @@
     <p:bg>
       <p:bgPr>
         <a:solidFill xmlns:a="http://schemas.openxmlformats.org/drawingml/2006/main">
-          <a:srgbClr val="FFFCF2"/>
+          <a:srgbClr val="FFFDF5"/>
         </a:solidFill>
       </p:bgPr>
     </p:bg>
@@ -2853,10 +2828,10 @@
       </p:grpSpPr>
       <p:sp>
         <p:nvSpPr>
-          <p:cNvPr id="12" name="">
-            <a:extLst xmlns:a="http://schemas.openxmlformats.org/drawingml/2006/main">
-              <a:ext uri="{FF2B5EF4-FFF2-40B4-BE49-F238E27FC236}">
-                <a16:creationId xmlns:a16="http://schemas.microsoft.com/office/drawing/2014/main" id="{128B7258-8191-4799-9A2E-AC2E402153D8}"/>
+          <p:cNvPr id="39" name="">
+            <a:extLst xmlns:a="http://schemas.openxmlformats.org/drawingml/2006/main">
+              <a:ext uri="{FF2B5EF4-FFF2-40B4-BE49-F238E27FC236}">
+                <a16:creationId xmlns:a16="http://schemas.microsoft.com/office/drawing/2014/main" id="{7EE9DCA2-D565-426E-8FC5-BEBD75442B16}"/>
               </a:ext>
             </a:extLst>
           </p:cNvPr>
@@ -2867,8 +2842,8 @@
         </p:nvSpPr>
         <p:spPr>
           <a:xfrm xmlns:a="http://schemas.openxmlformats.org/drawingml/2006/main">
-            <a:off x="609600" y="333375"/>
-            <a:ext cx="10972800" cy="714375"/>
+            <a:off x="609600" y="323850"/>
+            <a:ext cx="10972800" cy="666750"/>
           </a:xfrm>
           <a:prstGeom xmlns:a="http://schemas.openxmlformats.org/drawingml/2006/main" prst="rect">
             <a:avLst/>
@@ -2885,23 +2860,23 @@
           <a:lstStyle xmlns:a="http://schemas.openxmlformats.org/drawingml/2006/main"/>
           <a:p xmlns:a="http://schemas.openxmlformats.org/drawingml/2006/main">
             <a:pPr>
-              <a:defRPr sz="4050" b="1">
+              <a:defRPr sz="3450" b="1">
                 <a:solidFill>
-                  <a:srgbClr val="242720"/>
+                  <a:srgbClr val="263C3A"/>
                 </a:solidFill>
-                <a:latin typeface="Arial"/>
-                <a:ea typeface="Arial"/>
-                <a:cs typeface="Arial"/>
+                <a:latin typeface="DejaVu Sans"/>
+                <a:ea typeface="DejaVu Sans"/>
+                <a:cs typeface="DejaVu Sans"/>
               </a:defRPr>
             </a:pPr>
             <a:r>
-              <a:rPr sz="4050" b="1">
+              <a:rPr sz="3450" b="1">
                 <a:solidFill>
-                  <a:srgbClr val="242720"/>
+                  <a:srgbClr val="263C3A"/>
                 </a:solidFill>
-                <a:latin typeface="Arial"/>
-                <a:ea typeface="Arial"/>
-                <a:cs typeface="Arial"/>
+                <a:latin typeface="DejaVu Sans"/>
+                <a:ea typeface="DejaVu Sans"/>
+                <a:cs typeface="DejaVu Sans"/>
               </a:rPr>
               <a:t>Roll and retrieve</a:t>
             </a:r>
@@ -2913,7 +2888,7 @@
           <p:cNvPr id="2" name="">
             <a:extLst xmlns:a="http://schemas.openxmlformats.org/drawingml/2006/main">
               <a:ext uri="{FF2B5EF4-FFF2-40B4-BE49-F238E27FC236}">
-                <a16:creationId xmlns:a16="http://schemas.microsoft.com/office/drawing/2014/main" id="{F12A0613-8C40-4EBD-9DED-DA0C1BAAC9FD}"/>
+                <a16:creationId xmlns:a16="http://schemas.microsoft.com/office/drawing/2014/main" id="{2C6125A0-2951-416D-91E1-8F21DF232470}"/>
               </a:ext>
             </a:extLst>
           </p:cNvPr>
@@ -2924,8 +2899,8 @@
         </p:nvSpPr>
         <p:spPr>
           <a:xfrm xmlns:a="http://schemas.openxmlformats.org/drawingml/2006/main">
-            <a:off x="609600" y="1190625"/>
-            <a:ext cx="10972800" cy="476250"/>
+            <a:off x="609600" y="1085850"/>
+            <a:ext cx="10972800" cy="409575"/>
           </a:xfrm>
           <a:prstGeom xmlns:a="http://schemas.openxmlformats.org/drawingml/2006/main" prst="rect">
             <a:avLst/>
@@ -2942,25 +2917,25 @@
           <a:lstStyle xmlns:a="http://schemas.openxmlformats.org/drawingml/2006/main"/>
           <a:p xmlns:a="http://schemas.openxmlformats.org/drawingml/2006/main">
             <a:pPr>
-              <a:defRPr sz="2400" b="0">
+              <a:defRPr sz="2175" b="0">
                 <a:solidFill>
-                  <a:srgbClr val="242720"/>
+                  <a:srgbClr val="687572"/>
                 </a:solidFill>
-                <a:latin typeface="Arial"/>
-                <a:ea typeface="Arial"/>
-                <a:cs typeface="Arial"/>
+                <a:latin typeface="DejaVu Sans"/>
+                <a:ea typeface="DejaVu Sans"/>
+                <a:cs typeface="DejaVu Sans"/>
               </a:defRPr>
             </a:pPr>
             <a:r>
-              <a:rPr sz="2400" b="0">
+              <a:rPr sz="2175" b="0">
                 <a:solidFill>
-                  <a:srgbClr val="242720"/>
+                  <a:srgbClr val="687572"/>
                 </a:solidFill>
-                <a:latin typeface="Arial"/>
-                <a:ea typeface="Arial"/>
-                <a:cs typeface="Arial"/>
+                <a:latin typeface="DejaVu Sans"/>
+                <a:ea typeface="DejaVu Sans"/>
+                <a:cs typeface="DejaVu Sans"/>
               </a:rPr>
-              <a:t>[Add your topic or retrieval focus]</a:t>
+              <a:t>[Your topic or retrieval focus]</a:t>
             </a:r>
           </a:p>
         </p:txBody>
@@ -2970,7 +2945,7 @@
           <p:cNvPr id="3" name="">
             <a:extLst xmlns:a="http://schemas.openxmlformats.org/drawingml/2006/main">
               <a:ext uri="{FF2B5EF4-FFF2-40B4-BE49-F238E27FC236}">
-                <a16:creationId xmlns:a16="http://schemas.microsoft.com/office/drawing/2014/main" id="{CCE2E291-723B-43ED-A04B-4E8C22497C07}"/>
+                <a16:creationId xmlns:a16="http://schemas.microsoft.com/office/drawing/2014/main" id="{2F6BE3E7-389B-4392-B2A8-6663F96500CE}"/>
               </a:ext>
             </a:extLst>
           </p:cNvPr>
@@ -2981,8 +2956,38 @@
         </p:nvSpPr>
         <p:spPr>
           <a:xfrm xmlns:a="http://schemas.openxmlformats.org/drawingml/2006/main">
-            <a:off x="609600" y="1733550"/>
-            <a:ext cx="10972800" cy="400050"/>
+            <a:off x="609600" y="1676400"/>
+            <a:ext cx="10972800" cy="19050"/>
+          </a:xfrm>
+          <a:prstGeom xmlns:a="http://schemas.openxmlformats.org/drawingml/2006/main" prst="rect">
+            <a:avLst/>
+          </a:prstGeom>
+          <a:solidFill xmlns:a="http://schemas.openxmlformats.org/drawingml/2006/main">
+            <a:srgbClr val="A9BDB7"/>
+          </a:solidFill>
+          <a:ln xmlns:a="http://schemas.openxmlformats.org/drawingml/2006/main" w="0">
+            <a:noFill/>
+          </a:ln>
+        </p:spPr>
+      </p:sp>
+      <p:sp>
+        <p:nvSpPr>
+          <p:cNvPr id="4" name="">
+            <a:extLst xmlns:a="http://schemas.openxmlformats.org/drawingml/2006/main">
+              <a:ext uri="{FF2B5EF4-FFF2-40B4-BE49-F238E27FC236}">
+                <a16:creationId xmlns:a16="http://schemas.microsoft.com/office/drawing/2014/main" id="{EDFF897C-01D9-4C45-A1BF-AE773D5E7B8E}"/>
+              </a:ext>
+            </a:extLst>
+          </p:cNvPr>
+          <p:cNvSpPr>
+            <a:spLocks xmlns:a="http://schemas.openxmlformats.org/drawingml/2006/main" noGrp="1"/>
+          </p:cNvSpPr>
+          <p:nvPr/>
+        </p:nvSpPr>
+        <p:spPr>
+          <a:xfrm xmlns:a="http://schemas.openxmlformats.org/drawingml/2006/main">
+            <a:off x="609600" y="1828800"/>
+            <a:ext cx="4476750" cy="304800"/>
           </a:xfrm>
           <a:prstGeom xmlns:a="http://schemas.openxmlformats.org/drawingml/2006/main" prst="rect">
             <a:avLst/>
@@ -2999,35 +3004,35 @@
           <a:lstStyle xmlns:a="http://schemas.openxmlformats.org/drawingml/2006/main"/>
           <a:p xmlns:a="http://schemas.openxmlformats.org/drawingml/2006/main">
             <a:pPr>
-              <a:defRPr sz="1800" b="0">
+              <a:defRPr sz="1575" b="1">
                 <a:solidFill>
-                  <a:srgbClr val="28534A"/>
+                  <a:srgbClr val="263C3A"/>
                 </a:solidFill>
-                <a:latin typeface="Arial"/>
-                <a:ea typeface="Arial"/>
-                <a:cs typeface="Arial"/>
+                <a:latin typeface="DejaVu Sans"/>
+                <a:ea typeface="DejaVu Sans"/>
+                <a:cs typeface="DejaVu Sans"/>
               </a:defRPr>
             </a:pPr>
             <a:r>
-              <a:rPr sz="1800" b="0">
+              <a:rPr sz="1575" b="1">
                 <a:solidFill>
-                  <a:srgbClr val="28534A"/>
+                  <a:srgbClr val="263C3A"/>
                 </a:solidFill>
-                <a:latin typeface="Arial"/>
-                <a:ea typeface="Arial"/>
-                <a:cs typeface="Arial"/>
+                <a:latin typeface="DejaVu Sans"/>
+                <a:ea typeface="DejaVu Sans"/>
+                <a:cs typeface="DejaVu Sans"/>
               </a:rPr>
-              <a:t>Recall independently first. Check and improve after feedback.</a:t>
+              <a:t>01  Recall from memory</a:t>
             </a:r>
           </a:p>
         </p:txBody>
       </p:sp>
       <p:sp>
         <p:nvSpPr>
-          <p:cNvPr id="4" name="">
-            <a:extLst xmlns:a="http://schemas.openxmlformats.org/drawingml/2006/main">
-              <a:ext uri="{FF2B5EF4-FFF2-40B4-BE49-F238E27FC236}">
-                <a16:creationId xmlns:a16="http://schemas.microsoft.com/office/drawing/2014/main" id="{6812E15F-32B9-4109-9238-162B3F70E2EB}"/>
+          <p:cNvPr id="5" name="">
+            <a:extLst xmlns:a="http://schemas.openxmlformats.org/drawingml/2006/main">
+              <a:ext uri="{FF2B5EF4-FFF2-40B4-BE49-F238E27FC236}">
+                <a16:creationId xmlns:a16="http://schemas.microsoft.com/office/drawing/2014/main" id="{44BACE0F-0A74-4EBF-88AF-AC8C5587A1A6}"/>
               </a:ext>
             </a:extLst>
           </p:cNvPr>
@@ -3038,21 +3043,252 @@
         </p:nvSpPr>
         <p:spPr>
           <a:xfrm xmlns:a="http://schemas.openxmlformats.org/drawingml/2006/main">
-            <a:off x="609600" y="2190750"/>
-            <a:ext cx="3543300" cy="1581150"/>
+            <a:off x="6286500" y="1828800"/>
+            <a:ext cx="5048250" cy="304800"/>
           </a:xfrm>
           <a:prstGeom xmlns:a="http://schemas.openxmlformats.org/drawingml/2006/main" prst="rect">
             <a:avLst/>
           </a:prstGeom>
           <a:noFill xmlns:a="http://schemas.openxmlformats.org/drawingml/2006/main"/>
+          <a:ln xmlns:a="http://schemas.openxmlformats.org/drawingml/2006/main" w="0">
+            <a:noFill/>
+          </a:ln>
+        </p:spPr>
+        <p:txBody>
+          <a:bodyPr xmlns:a="http://schemas.openxmlformats.org/drawingml/2006/main" lIns="0" tIns="0" rIns="0" bIns="0" anchor="t">
+            <a:noAutofit/>
+          </a:bodyPr>
+          <a:lstStyle xmlns:a="http://schemas.openxmlformats.org/drawingml/2006/main"/>
+          <a:p xmlns:a="http://schemas.openxmlformats.org/drawingml/2006/main">
+            <a:pPr>
+              <a:defRPr sz="1575" b="1">
+                <a:solidFill>
+                  <a:srgbClr val="263C3A"/>
+                </a:solidFill>
+                <a:latin typeface="DejaVu Sans"/>
+                <a:ea typeface="DejaVu Sans"/>
+                <a:cs typeface="DejaVu Sans"/>
+              </a:defRPr>
+            </a:pPr>
+            <a:r>
+              <a:rPr sz="1575" b="1">
+                <a:solidFill>
+                  <a:srgbClr val="263C3A"/>
+                </a:solidFill>
+                <a:latin typeface="DejaVu Sans"/>
+                <a:ea typeface="DejaVu Sans"/>
+                <a:cs typeface="DejaVu Sans"/>
+              </a:rPr>
+              <a:t>02  Check and improve</a:t>
+            </a:r>
+          </a:p>
+        </p:txBody>
+      </p:sp>
+      <p:sp>
+        <p:nvSpPr>
+          <p:cNvPr id="6" name="">
+            <a:extLst xmlns:a="http://schemas.openxmlformats.org/drawingml/2006/main">
+              <a:ext uri="{FF2B5EF4-FFF2-40B4-BE49-F238E27FC236}">
+                <a16:creationId xmlns:a16="http://schemas.microsoft.com/office/drawing/2014/main" id="{3D674567-DF06-43BE-8AB2-6D19E3F5BBB5}"/>
+              </a:ext>
+            </a:extLst>
+          </p:cNvPr>
+          <p:cNvSpPr>
+            <a:spLocks xmlns:a="http://schemas.openxmlformats.org/drawingml/2006/main" noGrp="1"/>
+          </p:cNvSpPr>
+          <p:nvPr/>
+        </p:nvSpPr>
+        <p:spPr>
+          <a:xfrm xmlns:a="http://schemas.openxmlformats.org/drawingml/2006/main">
+            <a:off x="609600" y="2247900"/>
+            <a:ext cx="3543300" cy="1600200"/>
+          </a:xfrm>
+          <a:prstGeom xmlns:a="http://schemas.openxmlformats.org/drawingml/2006/main" prst="rect">
+            <a:avLst/>
+          </a:prstGeom>
+          <a:solidFill xmlns:a="http://schemas.openxmlformats.org/drawingml/2006/main">
+            <a:srgbClr val="EDF2F5"/>
+          </a:solidFill>
           <a:ln xmlns:a="http://schemas.openxmlformats.org/drawingml/2006/main" w="9525">
             <a:solidFill>
-              <a:srgbClr val="CBD0C4"/>
+              <a:srgbClr val="D4DFDB"/>
             </a:solidFill>
           </a:ln>
         </p:spPr>
+      </p:sp>
+      <p:sp>
+        <p:nvSpPr>
+          <p:cNvPr id="7" name="">
+            <a:extLst xmlns:a="http://schemas.openxmlformats.org/drawingml/2006/main">
+              <a:ext uri="{FF2B5EF4-FFF2-40B4-BE49-F238E27FC236}">
+                <a16:creationId xmlns:a16="http://schemas.microsoft.com/office/drawing/2014/main" id="{69945E3A-BFE4-4EAD-901B-98101A00D548}"/>
+              </a:ext>
+            </a:extLst>
+          </p:cNvPr>
+          <p:cNvSpPr>
+            <a:spLocks xmlns:a="http://schemas.openxmlformats.org/drawingml/2006/main" noGrp="1"/>
+          </p:cNvSpPr>
+          <p:nvPr/>
+        </p:nvSpPr>
+        <p:spPr>
+          <a:xfrm xmlns:a="http://schemas.openxmlformats.org/drawingml/2006/main">
+            <a:off x="800100" y="2419350"/>
+            <a:ext cx="381000" cy="381000"/>
+          </a:xfrm>
+          <a:prstGeom xmlns:a="http://schemas.openxmlformats.org/drawingml/2006/main" prst="ellipse">
+            <a:avLst/>
+          </a:prstGeom>
+          <a:solidFill xmlns:a="http://schemas.openxmlformats.org/drawingml/2006/main">
+            <a:srgbClr val="FFFFFF"/>
+          </a:solidFill>
+          <a:ln xmlns:a="http://schemas.openxmlformats.org/drawingml/2006/main" w="0">
+            <a:noFill/>
+          </a:ln>
+        </p:spPr>
+      </p:sp>
+      <p:sp>
+        <p:nvSpPr>
+          <p:cNvPr id="8" name="">
+            <a:extLst xmlns:a="http://schemas.openxmlformats.org/drawingml/2006/main">
+              <a:ext uri="{FF2B5EF4-FFF2-40B4-BE49-F238E27FC236}">
+                <a16:creationId xmlns:a16="http://schemas.microsoft.com/office/drawing/2014/main" id="{22864F91-62D0-479D-8751-B2AA04C77762}"/>
+              </a:ext>
+            </a:extLst>
+          </p:cNvPr>
+          <p:cNvSpPr>
+            <a:spLocks xmlns:a="http://schemas.openxmlformats.org/drawingml/2006/main" noGrp="1"/>
+          </p:cNvSpPr>
+          <p:nvPr/>
+        </p:nvSpPr>
+        <p:spPr>
+          <a:xfrm xmlns:a="http://schemas.openxmlformats.org/drawingml/2006/main">
+            <a:off x="857250" y="2486025"/>
+            <a:ext cx="342900" cy="285750"/>
+          </a:xfrm>
+          <a:prstGeom xmlns:a="http://schemas.openxmlformats.org/drawingml/2006/main" prst="rect">
+            <a:avLst/>
+          </a:prstGeom>
+          <a:noFill xmlns:a="http://schemas.openxmlformats.org/drawingml/2006/main"/>
+          <a:ln xmlns:a="http://schemas.openxmlformats.org/drawingml/2006/main" w="0">
+            <a:noFill/>
+          </a:ln>
+        </p:spPr>
         <p:txBody>
-          <a:bodyPr xmlns:a="http://schemas.openxmlformats.org/drawingml/2006/main" lIns="142875" tIns="114300" rIns="142875" bIns="0" anchor="t">
+          <a:bodyPr xmlns:a="http://schemas.openxmlformats.org/drawingml/2006/main" lIns="0" tIns="0" rIns="0" bIns="0" anchor="t">
+            <a:noAutofit/>
+          </a:bodyPr>
+          <a:lstStyle xmlns:a="http://schemas.openxmlformats.org/drawingml/2006/main"/>
+          <a:p xmlns:a="http://schemas.openxmlformats.org/drawingml/2006/main">
+            <a:pPr>
+              <a:defRPr sz="1350" b="1">
+                <a:solidFill>
+                  <a:srgbClr val="263C3A"/>
+                </a:solidFill>
+                <a:latin typeface="DejaVu Sans"/>
+                <a:ea typeface="DejaVu Sans"/>
+                <a:cs typeface="DejaVu Sans"/>
+              </a:defRPr>
+            </a:pPr>
+            <a:r>
+              <a:rPr sz="1350" b="1">
+                <a:solidFill>
+                  <a:srgbClr val="263C3A"/>
+                </a:solidFill>
+                <a:latin typeface="DejaVu Sans"/>
+                <a:ea typeface="DejaVu Sans"/>
+                <a:cs typeface="DejaVu Sans"/>
+              </a:rPr>
+              <a:t>01</a:t>
+            </a:r>
+          </a:p>
+        </p:txBody>
+      </p:sp>
+      <p:sp>
+        <p:nvSpPr>
+          <p:cNvPr id="9" name="">
+            <a:extLst xmlns:a="http://schemas.openxmlformats.org/drawingml/2006/main">
+              <a:ext uri="{FF2B5EF4-FFF2-40B4-BE49-F238E27FC236}">
+                <a16:creationId xmlns:a16="http://schemas.microsoft.com/office/drawing/2014/main" id="{D0ABBC09-42CB-4D03-BBD1-7B55F681D5C4}"/>
+              </a:ext>
+            </a:extLst>
+          </p:cNvPr>
+          <p:cNvSpPr>
+            <a:spLocks xmlns:a="http://schemas.openxmlformats.org/drawingml/2006/main" noGrp="1"/>
+          </p:cNvSpPr>
+          <p:nvPr/>
+        </p:nvSpPr>
+        <p:spPr>
+          <a:xfrm xmlns:a="http://schemas.openxmlformats.org/drawingml/2006/main">
+            <a:off x="1352550" y="2466975"/>
+            <a:ext cx="2609850" cy="428625"/>
+          </a:xfrm>
+          <a:prstGeom xmlns:a="http://schemas.openxmlformats.org/drawingml/2006/main" prst="rect">
+            <a:avLst/>
+          </a:prstGeom>
+          <a:noFill xmlns:a="http://schemas.openxmlformats.org/drawingml/2006/main"/>
+          <a:ln xmlns:a="http://schemas.openxmlformats.org/drawingml/2006/main" w="0">
+            <a:noFill/>
+          </a:ln>
+        </p:spPr>
+        <p:txBody>
+          <a:bodyPr xmlns:a="http://schemas.openxmlformats.org/drawingml/2006/main" lIns="0" tIns="0" rIns="0" bIns="0" anchor="t">
+            <a:noAutofit/>
+          </a:bodyPr>
+          <a:lstStyle xmlns:a="http://schemas.openxmlformats.org/drawingml/2006/main"/>
+          <a:p xmlns:a="http://schemas.openxmlformats.org/drawingml/2006/main">
+            <a:pPr>
+              <a:defRPr sz="1725" b="1">
+                <a:solidFill>
+                  <a:srgbClr val="263C3A"/>
+                </a:solidFill>
+                <a:latin typeface="DejaVu Sans"/>
+                <a:ea typeface="DejaVu Sans"/>
+                <a:cs typeface="DejaVu Sans"/>
+              </a:defRPr>
+            </a:pPr>
+            <a:r>
+              <a:rPr sz="1725" b="1">
+                <a:solidFill>
+                  <a:srgbClr val="263C3A"/>
+                </a:solidFill>
+                <a:latin typeface="DejaVu Sans"/>
+                <a:ea typeface="DejaVu Sans"/>
+                <a:cs typeface="DejaVu Sans"/>
+              </a:rPr>
+              <a:t>Roll 1</a:t>
+            </a:r>
+          </a:p>
+        </p:txBody>
+      </p:sp>
+      <p:sp>
+        <p:nvSpPr>
+          <p:cNvPr id="10" name="">
+            <a:extLst xmlns:a="http://schemas.openxmlformats.org/drawingml/2006/main">
+              <a:ext uri="{FF2B5EF4-FFF2-40B4-BE49-F238E27FC236}">
+                <a16:creationId xmlns:a16="http://schemas.microsoft.com/office/drawing/2014/main" id="{8B84E2C6-A14B-448F-AB6D-08B1A7FC90AD}"/>
+              </a:ext>
+            </a:extLst>
+          </p:cNvPr>
+          <p:cNvSpPr>
+            <a:spLocks xmlns:a="http://schemas.openxmlformats.org/drawingml/2006/main" noGrp="1"/>
+          </p:cNvSpPr>
+          <p:nvPr/>
+        </p:nvSpPr>
+        <p:spPr>
+          <a:xfrm xmlns:a="http://schemas.openxmlformats.org/drawingml/2006/main">
+            <a:off x="819150" y="2990850"/>
+            <a:ext cx="3124200" cy="695325"/>
+          </a:xfrm>
+          <a:prstGeom xmlns:a="http://schemas.openxmlformats.org/drawingml/2006/main" prst="rect">
+            <a:avLst/>
+          </a:prstGeom>
+          <a:noFill xmlns:a="http://schemas.openxmlformats.org/drawingml/2006/main"/>
+          <a:ln xmlns:a="http://schemas.openxmlformats.org/drawingml/2006/main" w="0">
+            <a:noFill/>
+          </a:ln>
+        </p:spPr>
+        <p:txBody>
+          <a:bodyPr xmlns:a="http://schemas.openxmlformats.org/drawingml/2006/main" lIns="0" tIns="0" rIns="0" bIns="0" anchor="t">
             <a:noAutofit/>
           </a:bodyPr>
           <a:lstStyle xmlns:a="http://schemas.openxmlformats.org/drawingml/2006/main"/>
@@ -3060,33 +3296,33 @@
             <a:pPr>
               <a:defRPr sz="1950" b="0">
                 <a:solidFill>
-                  <a:srgbClr val="42473D"/>
+                  <a:srgbClr val="687572"/>
                 </a:solidFill>
-                <a:latin typeface="Arial"/>
-                <a:ea typeface="Arial"/>
-                <a:cs typeface="Arial"/>
+                <a:latin typeface="DejaVu Sans"/>
+                <a:ea typeface="DejaVu Sans"/>
+                <a:cs typeface="DejaVu Sans"/>
               </a:defRPr>
             </a:pPr>
             <a:r>
               <a:rPr sz="1950" b="0">
                 <a:solidFill>
-                  <a:srgbClr val="42473D"/>
+                  <a:srgbClr val="687572"/>
                 </a:solidFill>
-                <a:latin typeface="Arial"/>
-                <a:ea typeface="Arial"/>
-                <a:cs typeface="Arial"/>
+                <a:latin typeface="DejaVu Sans"/>
+                <a:ea typeface="DejaVu Sans"/>
+                <a:cs typeface="DejaVu Sans"/>
               </a:rPr>
-              <a:t>1. [Add a prompt]</a:t>
+              <a:t>[Your prompt]</a:t>
             </a:r>
           </a:p>
         </p:txBody>
       </p:sp>
       <p:sp>
         <p:nvSpPr>
-          <p:cNvPr id="5" name="">
-            <a:extLst xmlns:a="http://schemas.openxmlformats.org/drawingml/2006/main">
-              <a:ext uri="{FF2B5EF4-FFF2-40B4-BE49-F238E27FC236}">
-                <a16:creationId xmlns:a16="http://schemas.microsoft.com/office/drawing/2014/main" id="{6A3E3CA8-A432-4F0F-883E-840D25E1A359}"/>
+          <p:cNvPr id="11" name="">
+            <a:extLst xmlns:a="http://schemas.openxmlformats.org/drawingml/2006/main">
+              <a:ext uri="{FF2B5EF4-FFF2-40B4-BE49-F238E27FC236}">
+                <a16:creationId xmlns:a16="http://schemas.microsoft.com/office/drawing/2014/main" id="{D94537A4-0D5B-402D-BCF2-8FE06A239D4F}"/>
               </a:ext>
             </a:extLst>
           </p:cNvPr>
@@ -3097,21 +3333,195 @@
         </p:nvSpPr>
         <p:spPr>
           <a:xfrm xmlns:a="http://schemas.openxmlformats.org/drawingml/2006/main">
-            <a:off x="4324350" y="2190750"/>
-            <a:ext cx="3543300" cy="1581150"/>
-          </a:xfrm>
-          <a:prstGeom xmlns:a="http://schemas.openxmlformats.org/drawingml/2006/main" prst="rect">
-            <a:avLst/>
-          </a:prstGeom>
-          <a:noFill xmlns:a="http://schemas.openxmlformats.org/drawingml/2006/main"/>
+            <a:off x="4324350" y="2247900"/>
+            <a:ext cx="3543300" cy="1600200"/>
+          </a:xfrm>
+          <a:prstGeom xmlns:a="http://schemas.openxmlformats.org/drawingml/2006/main" prst="rect">
+            <a:avLst/>
+          </a:prstGeom>
+          <a:solidFill xmlns:a="http://schemas.openxmlformats.org/drawingml/2006/main">
+            <a:srgbClr val="EAF1EC"/>
+          </a:solidFill>
           <a:ln xmlns:a="http://schemas.openxmlformats.org/drawingml/2006/main" w="9525">
             <a:solidFill>
-              <a:srgbClr val="CBD0C4"/>
+              <a:srgbClr val="D4DFDB"/>
             </a:solidFill>
           </a:ln>
         </p:spPr>
+      </p:sp>
+      <p:sp>
+        <p:nvSpPr>
+          <p:cNvPr id="12" name="">
+            <a:extLst xmlns:a="http://schemas.openxmlformats.org/drawingml/2006/main">
+              <a:ext uri="{FF2B5EF4-FFF2-40B4-BE49-F238E27FC236}">
+                <a16:creationId xmlns:a16="http://schemas.microsoft.com/office/drawing/2014/main" id="{0B784141-55F6-4F40-B535-59DDF7002091}"/>
+              </a:ext>
+            </a:extLst>
+          </p:cNvPr>
+          <p:cNvSpPr>
+            <a:spLocks xmlns:a="http://schemas.openxmlformats.org/drawingml/2006/main" noGrp="1"/>
+          </p:cNvSpPr>
+          <p:nvPr/>
+        </p:nvSpPr>
+        <p:spPr>
+          <a:xfrm xmlns:a="http://schemas.openxmlformats.org/drawingml/2006/main">
+            <a:off x="4514850" y="2419350"/>
+            <a:ext cx="381000" cy="381000"/>
+          </a:xfrm>
+          <a:prstGeom xmlns:a="http://schemas.openxmlformats.org/drawingml/2006/main" prst="ellipse">
+            <a:avLst/>
+          </a:prstGeom>
+          <a:solidFill xmlns:a="http://schemas.openxmlformats.org/drawingml/2006/main">
+            <a:srgbClr val="FFFFFF"/>
+          </a:solidFill>
+          <a:ln xmlns:a="http://schemas.openxmlformats.org/drawingml/2006/main" w="0">
+            <a:noFill/>
+          </a:ln>
+        </p:spPr>
+      </p:sp>
+      <p:sp>
+        <p:nvSpPr>
+          <p:cNvPr id="13" name="">
+            <a:extLst xmlns:a="http://schemas.openxmlformats.org/drawingml/2006/main">
+              <a:ext uri="{FF2B5EF4-FFF2-40B4-BE49-F238E27FC236}">
+                <a16:creationId xmlns:a16="http://schemas.microsoft.com/office/drawing/2014/main" id="{50C4345A-697F-4C0E-833E-13228B7320E3}"/>
+              </a:ext>
+            </a:extLst>
+          </p:cNvPr>
+          <p:cNvSpPr>
+            <a:spLocks xmlns:a="http://schemas.openxmlformats.org/drawingml/2006/main" noGrp="1"/>
+          </p:cNvSpPr>
+          <p:nvPr/>
+        </p:nvSpPr>
+        <p:spPr>
+          <a:xfrm xmlns:a="http://schemas.openxmlformats.org/drawingml/2006/main">
+            <a:off x="4572000" y="2486025"/>
+            <a:ext cx="342900" cy="285750"/>
+          </a:xfrm>
+          <a:prstGeom xmlns:a="http://schemas.openxmlformats.org/drawingml/2006/main" prst="rect">
+            <a:avLst/>
+          </a:prstGeom>
+          <a:noFill xmlns:a="http://schemas.openxmlformats.org/drawingml/2006/main"/>
+          <a:ln xmlns:a="http://schemas.openxmlformats.org/drawingml/2006/main" w="0">
+            <a:noFill/>
+          </a:ln>
+        </p:spPr>
         <p:txBody>
-          <a:bodyPr xmlns:a="http://schemas.openxmlformats.org/drawingml/2006/main" lIns="142875" tIns="114300" rIns="142875" bIns="0" anchor="t">
+          <a:bodyPr xmlns:a="http://schemas.openxmlformats.org/drawingml/2006/main" lIns="0" tIns="0" rIns="0" bIns="0" anchor="t">
+            <a:noAutofit/>
+          </a:bodyPr>
+          <a:lstStyle xmlns:a="http://schemas.openxmlformats.org/drawingml/2006/main"/>
+          <a:p xmlns:a="http://schemas.openxmlformats.org/drawingml/2006/main">
+            <a:pPr>
+              <a:defRPr sz="1350" b="1">
+                <a:solidFill>
+                  <a:srgbClr val="263C3A"/>
+                </a:solidFill>
+                <a:latin typeface="DejaVu Sans"/>
+                <a:ea typeface="DejaVu Sans"/>
+                <a:cs typeface="DejaVu Sans"/>
+              </a:defRPr>
+            </a:pPr>
+            <a:r>
+              <a:rPr sz="1350" b="1">
+                <a:solidFill>
+                  <a:srgbClr val="263C3A"/>
+                </a:solidFill>
+                <a:latin typeface="DejaVu Sans"/>
+                <a:ea typeface="DejaVu Sans"/>
+                <a:cs typeface="DejaVu Sans"/>
+              </a:rPr>
+              <a:t>02</a:t>
+            </a:r>
+          </a:p>
+        </p:txBody>
+      </p:sp>
+      <p:sp>
+        <p:nvSpPr>
+          <p:cNvPr id="14" name="">
+            <a:extLst xmlns:a="http://schemas.openxmlformats.org/drawingml/2006/main">
+              <a:ext uri="{FF2B5EF4-FFF2-40B4-BE49-F238E27FC236}">
+                <a16:creationId xmlns:a16="http://schemas.microsoft.com/office/drawing/2014/main" id="{98BA358D-4E5E-410E-BAA5-34EF6C8CDF06}"/>
+              </a:ext>
+            </a:extLst>
+          </p:cNvPr>
+          <p:cNvSpPr>
+            <a:spLocks xmlns:a="http://schemas.openxmlformats.org/drawingml/2006/main" noGrp="1"/>
+          </p:cNvSpPr>
+          <p:nvPr/>
+        </p:nvSpPr>
+        <p:spPr>
+          <a:xfrm xmlns:a="http://schemas.openxmlformats.org/drawingml/2006/main">
+            <a:off x="5067300" y="2466975"/>
+            <a:ext cx="2609850" cy="428625"/>
+          </a:xfrm>
+          <a:prstGeom xmlns:a="http://schemas.openxmlformats.org/drawingml/2006/main" prst="rect">
+            <a:avLst/>
+          </a:prstGeom>
+          <a:noFill xmlns:a="http://schemas.openxmlformats.org/drawingml/2006/main"/>
+          <a:ln xmlns:a="http://schemas.openxmlformats.org/drawingml/2006/main" w="0">
+            <a:noFill/>
+          </a:ln>
+        </p:spPr>
+        <p:txBody>
+          <a:bodyPr xmlns:a="http://schemas.openxmlformats.org/drawingml/2006/main" lIns="0" tIns="0" rIns="0" bIns="0" anchor="t">
+            <a:noAutofit/>
+          </a:bodyPr>
+          <a:lstStyle xmlns:a="http://schemas.openxmlformats.org/drawingml/2006/main"/>
+          <a:p xmlns:a="http://schemas.openxmlformats.org/drawingml/2006/main">
+            <a:pPr>
+              <a:defRPr sz="1725" b="1">
+                <a:solidFill>
+                  <a:srgbClr val="263C3A"/>
+                </a:solidFill>
+                <a:latin typeface="DejaVu Sans"/>
+                <a:ea typeface="DejaVu Sans"/>
+                <a:cs typeface="DejaVu Sans"/>
+              </a:defRPr>
+            </a:pPr>
+            <a:r>
+              <a:rPr sz="1725" b="1">
+                <a:solidFill>
+                  <a:srgbClr val="263C3A"/>
+                </a:solidFill>
+                <a:latin typeface="DejaVu Sans"/>
+                <a:ea typeface="DejaVu Sans"/>
+                <a:cs typeface="DejaVu Sans"/>
+              </a:rPr>
+              <a:t>Roll 2</a:t>
+            </a:r>
+          </a:p>
+        </p:txBody>
+      </p:sp>
+      <p:sp>
+        <p:nvSpPr>
+          <p:cNvPr id="15" name="">
+            <a:extLst xmlns:a="http://schemas.openxmlformats.org/drawingml/2006/main">
+              <a:ext uri="{FF2B5EF4-FFF2-40B4-BE49-F238E27FC236}">
+                <a16:creationId xmlns:a16="http://schemas.microsoft.com/office/drawing/2014/main" id="{FB911EF9-1AED-469C-ABA4-158C02249D2A}"/>
+              </a:ext>
+            </a:extLst>
+          </p:cNvPr>
+          <p:cNvSpPr>
+            <a:spLocks xmlns:a="http://schemas.openxmlformats.org/drawingml/2006/main" noGrp="1"/>
+          </p:cNvSpPr>
+          <p:nvPr/>
+        </p:nvSpPr>
+        <p:spPr>
+          <a:xfrm xmlns:a="http://schemas.openxmlformats.org/drawingml/2006/main">
+            <a:off x="4533900" y="2990850"/>
+            <a:ext cx="3124200" cy="695325"/>
+          </a:xfrm>
+          <a:prstGeom xmlns:a="http://schemas.openxmlformats.org/drawingml/2006/main" prst="rect">
+            <a:avLst/>
+          </a:prstGeom>
+          <a:noFill xmlns:a="http://schemas.openxmlformats.org/drawingml/2006/main"/>
+          <a:ln xmlns:a="http://schemas.openxmlformats.org/drawingml/2006/main" w="0">
+            <a:noFill/>
+          </a:ln>
+        </p:spPr>
+        <p:txBody>
+          <a:bodyPr xmlns:a="http://schemas.openxmlformats.org/drawingml/2006/main" lIns="0" tIns="0" rIns="0" bIns="0" anchor="t">
             <a:noAutofit/>
           </a:bodyPr>
           <a:lstStyle xmlns:a="http://schemas.openxmlformats.org/drawingml/2006/main"/>
@@ -3119,33 +3529,33 @@
             <a:pPr>
               <a:defRPr sz="1950" b="0">
                 <a:solidFill>
-                  <a:srgbClr val="42473D"/>
+                  <a:srgbClr val="687572"/>
                 </a:solidFill>
-                <a:latin typeface="Arial"/>
-                <a:ea typeface="Arial"/>
-                <a:cs typeface="Arial"/>
+                <a:latin typeface="DejaVu Sans"/>
+                <a:ea typeface="DejaVu Sans"/>
+                <a:cs typeface="DejaVu Sans"/>
               </a:defRPr>
             </a:pPr>
             <a:r>
               <a:rPr sz="1950" b="0">
                 <a:solidFill>
-                  <a:srgbClr val="42473D"/>
+                  <a:srgbClr val="687572"/>
                 </a:solidFill>
-                <a:latin typeface="Arial"/>
-                <a:ea typeface="Arial"/>
-                <a:cs typeface="Arial"/>
+                <a:latin typeface="DejaVu Sans"/>
+                <a:ea typeface="DejaVu Sans"/>
+                <a:cs typeface="DejaVu Sans"/>
               </a:rPr>
-              <a:t>2. [Add a prompt]</a:t>
+              <a:t>[Your prompt]</a:t>
             </a:r>
           </a:p>
         </p:txBody>
       </p:sp>
       <p:sp>
         <p:nvSpPr>
-          <p:cNvPr id="6" name="">
-            <a:extLst xmlns:a="http://schemas.openxmlformats.org/drawingml/2006/main">
-              <a:ext uri="{FF2B5EF4-FFF2-40B4-BE49-F238E27FC236}">
-                <a16:creationId xmlns:a16="http://schemas.microsoft.com/office/drawing/2014/main" id="{B835FFA5-4555-48F1-99AE-CBC73C790A38}"/>
+          <p:cNvPr id="16" name="">
+            <a:extLst xmlns:a="http://schemas.openxmlformats.org/drawingml/2006/main">
+              <a:ext uri="{FF2B5EF4-FFF2-40B4-BE49-F238E27FC236}">
+                <a16:creationId xmlns:a16="http://schemas.microsoft.com/office/drawing/2014/main" id="{64BFA100-C5C2-495F-AAC6-60E6C6A62592}"/>
               </a:ext>
             </a:extLst>
           </p:cNvPr>
@@ -3156,21 +3566,195 @@
         </p:nvSpPr>
         <p:spPr>
           <a:xfrm xmlns:a="http://schemas.openxmlformats.org/drawingml/2006/main">
-            <a:off x="8039100" y="2190750"/>
-            <a:ext cx="3543300" cy="1581150"/>
-          </a:xfrm>
-          <a:prstGeom xmlns:a="http://schemas.openxmlformats.org/drawingml/2006/main" prst="rect">
-            <a:avLst/>
-          </a:prstGeom>
-          <a:noFill xmlns:a="http://schemas.openxmlformats.org/drawingml/2006/main"/>
+            <a:off x="8039100" y="2247900"/>
+            <a:ext cx="3543300" cy="1600200"/>
+          </a:xfrm>
+          <a:prstGeom xmlns:a="http://schemas.openxmlformats.org/drawingml/2006/main" prst="rect">
+            <a:avLst/>
+          </a:prstGeom>
+          <a:solidFill xmlns:a="http://schemas.openxmlformats.org/drawingml/2006/main">
+            <a:srgbClr val="EDF2F5"/>
+          </a:solidFill>
           <a:ln xmlns:a="http://schemas.openxmlformats.org/drawingml/2006/main" w="9525">
             <a:solidFill>
-              <a:srgbClr val="CBD0C4"/>
+              <a:srgbClr val="D4DFDB"/>
             </a:solidFill>
           </a:ln>
         </p:spPr>
+      </p:sp>
+      <p:sp>
+        <p:nvSpPr>
+          <p:cNvPr id="17" name="">
+            <a:extLst xmlns:a="http://schemas.openxmlformats.org/drawingml/2006/main">
+              <a:ext uri="{FF2B5EF4-FFF2-40B4-BE49-F238E27FC236}">
+                <a16:creationId xmlns:a16="http://schemas.microsoft.com/office/drawing/2014/main" id="{D5B8185C-687D-4EF9-A3F1-7B8F0059990F}"/>
+              </a:ext>
+            </a:extLst>
+          </p:cNvPr>
+          <p:cNvSpPr>
+            <a:spLocks xmlns:a="http://schemas.openxmlformats.org/drawingml/2006/main" noGrp="1"/>
+          </p:cNvSpPr>
+          <p:nvPr/>
+        </p:nvSpPr>
+        <p:spPr>
+          <a:xfrm xmlns:a="http://schemas.openxmlformats.org/drawingml/2006/main">
+            <a:off x="8229600" y="2419350"/>
+            <a:ext cx="381000" cy="381000"/>
+          </a:xfrm>
+          <a:prstGeom xmlns:a="http://schemas.openxmlformats.org/drawingml/2006/main" prst="ellipse">
+            <a:avLst/>
+          </a:prstGeom>
+          <a:solidFill xmlns:a="http://schemas.openxmlformats.org/drawingml/2006/main">
+            <a:srgbClr val="FFFFFF"/>
+          </a:solidFill>
+          <a:ln xmlns:a="http://schemas.openxmlformats.org/drawingml/2006/main" w="0">
+            <a:noFill/>
+          </a:ln>
+        </p:spPr>
+      </p:sp>
+      <p:sp>
+        <p:nvSpPr>
+          <p:cNvPr id="18" name="">
+            <a:extLst xmlns:a="http://schemas.openxmlformats.org/drawingml/2006/main">
+              <a:ext uri="{FF2B5EF4-FFF2-40B4-BE49-F238E27FC236}">
+                <a16:creationId xmlns:a16="http://schemas.microsoft.com/office/drawing/2014/main" id="{0D76661A-704F-4793-9156-A4603EC00ED0}"/>
+              </a:ext>
+            </a:extLst>
+          </p:cNvPr>
+          <p:cNvSpPr>
+            <a:spLocks xmlns:a="http://schemas.openxmlformats.org/drawingml/2006/main" noGrp="1"/>
+          </p:cNvSpPr>
+          <p:nvPr/>
+        </p:nvSpPr>
+        <p:spPr>
+          <a:xfrm xmlns:a="http://schemas.openxmlformats.org/drawingml/2006/main">
+            <a:off x="8286750" y="2486025"/>
+            <a:ext cx="342900" cy="285750"/>
+          </a:xfrm>
+          <a:prstGeom xmlns:a="http://schemas.openxmlformats.org/drawingml/2006/main" prst="rect">
+            <a:avLst/>
+          </a:prstGeom>
+          <a:noFill xmlns:a="http://schemas.openxmlformats.org/drawingml/2006/main"/>
+          <a:ln xmlns:a="http://schemas.openxmlformats.org/drawingml/2006/main" w="0">
+            <a:noFill/>
+          </a:ln>
+        </p:spPr>
         <p:txBody>
-          <a:bodyPr xmlns:a="http://schemas.openxmlformats.org/drawingml/2006/main" lIns="142875" tIns="114300" rIns="142875" bIns="0" anchor="t">
+          <a:bodyPr xmlns:a="http://schemas.openxmlformats.org/drawingml/2006/main" lIns="0" tIns="0" rIns="0" bIns="0" anchor="t">
+            <a:noAutofit/>
+          </a:bodyPr>
+          <a:lstStyle xmlns:a="http://schemas.openxmlformats.org/drawingml/2006/main"/>
+          <a:p xmlns:a="http://schemas.openxmlformats.org/drawingml/2006/main">
+            <a:pPr>
+              <a:defRPr sz="1350" b="1">
+                <a:solidFill>
+                  <a:srgbClr val="263C3A"/>
+                </a:solidFill>
+                <a:latin typeface="DejaVu Sans"/>
+                <a:ea typeface="DejaVu Sans"/>
+                <a:cs typeface="DejaVu Sans"/>
+              </a:defRPr>
+            </a:pPr>
+            <a:r>
+              <a:rPr sz="1350" b="1">
+                <a:solidFill>
+                  <a:srgbClr val="263C3A"/>
+                </a:solidFill>
+                <a:latin typeface="DejaVu Sans"/>
+                <a:ea typeface="DejaVu Sans"/>
+                <a:cs typeface="DejaVu Sans"/>
+              </a:rPr>
+              <a:t>03</a:t>
+            </a:r>
+          </a:p>
+        </p:txBody>
+      </p:sp>
+      <p:sp>
+        <p:nvSpPr>
+          <p:cNvPr id="19" name="">
+            <a:extLst xmlns:a="http://schemas.openxmlformats.org/drawingml/2006/main">
+              <a:ext uri="{FF2B5EF4-FFF2-40B4-BE49-F238E27FC236}">
+                <a16:creationId xmlns:a16="http://schemas.microsoft.com/office/drawing/2014/main" id="{2BCBD1C6-80D4-48E3-8770-9048864081DD}"/>
+              </a:ext>
+            </a:extLst>
+          </p:cNvPr>
+          <p:cNvSpPr>
+            <a:spLocks xmlns:a="http://schemas.openxmlformats.org/drawingml/2006/main" noGrp="1"/>
+          </p:cNvSpPr>
+          <p:nvPr/>
+        </p:nvSpPr>
+        <p:spPr>
+          <a:xfrm xmlns:a="http://schemas.openxmlformats.org/drawingml/2006/main">
+            <a:off x="8782050" y="2466975"/>
+            <a:ext cx="2609850" cy="428625"/>
+          </a:xfrm>
+          <a:prstGeom xmlns:a="http://schemas.openxmlformats.org/drawingml/2006/main" prst="rect">
+            <a:avLst/>
+          </a:prstGeom>
+          <a:noFill xmlns:a="http://schemas.openxmlformats.org/drawingml/2006/main"/>
+          <a:ln xmlns:a="http://schemas.openxmlformats.org/drawingml/2006/main" w="0">
+            <a:noFill/>
+          </a:ln>
+        </p:spPr>
+        <p:txBody>
+          <a:bodyPr xmlns:a="http://schemas.openxmlformats.org/drawingml/2006/main" lIns="0" tIns="0" rIns="0" bIns="0" anchor="t">
+            <a:noAutofit/>
+          </a:bodyPr>
+          <a:lstStyle xmlns:a="http://schemas.openxmlformats.org/drawingml/2006/main"/>
+          <a:p xmlns:a="http://schemas.openxmlformats.org/drawingml/2006/main">
+            <a:pPr>
+              <a:defRPr sz="1725" b="1">
+                <a:solidFill>
+                  <a:srgbClr val="263C3A"/>
+                </a:solidFill>
+                <a:latin typeface="DejaVu Sans"/>
+                <a:ea typeface="DejaVu Sans"/>
+                <a:cs typeface="DejaVu Sans"/>
+              </a:defRPr>
+            </a:pPr>
+            <a:r>
+              <a:rPr sz="1725" b="1">
+                <a:solidFill>
+                  <a:srgbClr val="263C3A"/>
+                </a:solidFill>
+                <a:latin typeface="DejaVu Sans"/>
+                <a:ea typeface="DejaVu Sans"/>
+                <a:cs typeface="DejaVu Sans"/>
+              </a:rPr>
+              <a:t>Roll 3</a:t>
+            </a:r>
+          </a:p>
+        </p:txBody>
+      </p:sp>
+      <p:sp>
+        <p:nvSpPr>
+          <p:cNvPr id="20" name="">
+            <a:extLst xmlns:a="http://schemas.openxmlformats.org/drawingml/2006/main">
+              <a:ext uri="{FF2B5EF4-FFF2-40B4-BE49-F238E27FC236}">
+                <a16:creationId xmlns:a16="http://schemas.microsoft.com/office/drawing/2014/main" id="{95BBC397-A984-46F1-8EE4-2F51B8500540}"/>
+              </a:ext>
+            </a:extLst>
+          </p:cNvPr>
+          <p:cNvSpPr>
+            <a:spLocks xmlns:a="http://schemas.openxmlformats.org/drawingml/2006/main" noGrp="1"/>
+          </p:cNvSpPr>
+          <p:nvPr/>
+        </p:nvSpPr>
+        <p:spPr>
+          <a:xfrm xmlns:a="http://schemas.openxmlformats.org/drawingml/2006/main">
+            <a:off x="8248650" y="2990850"/>
+            <a:ext cx="3124200" cy="695325"/>
+          </a:xfrm>
+          <a:prstGeom xmlns:a="http://schemas.openxmlformats.org/drawingml/2006/main" prst="rect">
+            <a:avLst/>
+          </a:prstGeom>
+          <a:noFill xmlns:a="http://schemas.openxmlformats.org/drawingml/2006/main"/>
+          <a:ln xmlns:a="http://schemas.openxmlformats.org/drawingml/2006/main" w="0">
+            <a:noFill/>
+          </a:ln>
+        </p:spPr>
+        <p:txBody>
+          <a:bodyPr xmlns:a="http://schemas.openxmlformats.org/drawingml/2006/main" lIns="0" tIns="0" rIns="0" bIns="0" anchor="t">
             <a:noAutofit/>
           </a:bodyPr>
           <a:lstStyle xmlns:a="http://schemas.openxmlformats.org/drawingml/2006/main"/>
@@ -3178,33 +3762,33 @@
             <a:pPr>
               <a:defRPr sz="1950" b="0">
                 <a:solidFill>
-                  <a:srgbClr val="42473D"/>
+                  <a:srgbClr val="687572"/>
                 </a:solidFill>
-                <a:latin typeface="Arial"/>
-                <a:ea typeface="Arial"/>
-                <a:cs typeface="Arial"/>
+                <a:latin typeface="DejaVu Sans"/>
+                <a:ea typeface="DejaVu Sans"/>
+                <a:cs typeface="DejaVu Sans"/>
               </a:defRPr>
             </a:pPr>
             <a:r>
               <a:rPr sz="1950" b="0">
                 <a:solidFill>
-                  <a:srgbClr val="42473D"/>
+                  <a:srgbClr val="687572"/>
                 </a:solidFill>
-                <a:latin typeface="Arial"/>
-                <a:ea typeface="Arial"/>
-                <a:cs typeface="Arial"/>
+                <a:latin typeface="DejaVu Sans"/>
+                <a:ea typeface="DejaVu Sans"/>
+                <a:cs typeface="DejaVu Sans"/>
               </a:rPr>
-              <a:t>3. [Add a prompt]</a:t>
+              <a:t>[Your prompt]</a:t>
             </a:r>
           </a:p>
         </p:txBody>
       </p:sp>
       <p:sp>
         <p:nvSpPr>
-          <p:cNvPr id="7" name="">
-            <a:extLst xmlns:a="http://schemas.openxmlformats.org/drawingml/2006/main">
-              <a:ext uri="{FF2B5EF4-FFF2-40B4-BE49-F238E27FC236}">
-                <a16:creationId xmlns:a16="http://schemas.microsoft.com/office/drawing/2014/main" id="{3E2B3E35-BE26-40EF-BE47-3A0D4671BD43}"/>
+          <p:cNvPr id="21" name="">
+            <a:extLst xmlns:a="http://schemas.openxmlformats.org/drawingml/2006/main">
+              <a:ext uri="{FF2B5EF4-FFF2-40B4-BE49-F238E27FC236}">
+                <a16:creationId xmlns:a16="http://schemas.microsoft.com/office/drawing/2014/main" id="{E2F9CBB1-88EE-4136-ADAD-F07E6B8CEDEE}"/>
               </a:ext>
             </a:extLst>
           </p:cNvPr>
@@ -3215,21 +3799,195 @@
         </p:nvSpPr>
         <p:spPr>
           <a:xfrm xmlns:a="http://schemas.openxmlformats.org/drawingml/2006/main">
-            <a:off x="609600" y="3943350"/>
-            <a:ext cx="3543300" cy="1581150"/>
-          </a:xfrm>
-          <a:prstGeom xmlns:a="http://schemas.openxmlformats.org/drawingml/2006/main" prst="rect">
-            <a:avLst/>
-          </a:prstGeom>
-          <a:noFill xmlns:a="http://schemas.openxmlformats.org/drawingml/2006/main"/>
+            <a:off x="609600" y="4019550"/>
+            <a:ext cx="3543300" cy="1600200"/>
+          </a:xfrm>
+          <a:prstGeom xmlns:a="http://schemas.openxmlformats.org/drawingml/2006/main" prst="rect">
+            <a:avLst/>
+          </a:prstGeom>
+          <a:solidFill xmlns:a="http://schemas.openxmlformats.org/drawingml/2006/main">
+            <a:srgbClr val="EAF1EC"/>
+          </a:solidFill>
           <a:ln xmlns:a="http://schemas.openxmlformats.org/drawingml/2006/main" w="9525">
             <a:solidFill>
-              <a:srgbClr val="CBD0C4"/>
+              <a:srgbClr val="D4DFDB"/>
             </a:solidFill>
           </a:ln>
         </p:spPr>
+      </p:sp>
+      <p:sp>
+        <p:nvSpPr>
+          <p:cNvPr id="22" name="">
+            <a:extLst xmlns:a="http://schemas.openxmlformats.org/drawingml/2006/main">
+              <a:ext uri="{FF2B5EF4-FFF2-40B4-BE49-F238E27FC236}">
+                <a16:creationId xmlns:a16="http://schemas.microsoft.com/office/drawing/2014/main" id="{0B245231-2BB0-408B-A782-C58363A78106}"/>
+              </a:ext>
+            </a:extLst>
+          </p:cNvPr>
+          <p:cNvSpPr>
+            <a:spLocks xmlns:a="http://schemas.openxmlformats.org/drawingml/2006/main" noGrp="1"/>
+          </p:cNvSpPr>
+          <p:nvPr/>
+        </p:nvSpPr>
+        <p:spPr>
+          <a:xfrm xmlns:a="http://schemas.openxmlformats.org/drawingml/2006/main">
+            <a:off x="800100" y="4191000"/>
+            <a:ext cx="381000" cy="381000"/>
+          </a:xfrm>
+          <a:prstGeom xmlns:a="http://schemas.openxmlformats.org/drawingml/2006/main" prst="ellipse">
+            <a:avLst/>
+          </a:prstGeom>
+          <a:solidFill xmlns:a="http://schemas.openxmlformats.org/drawingml/2006/main">
+            <a:srgbClr val="FFFFFF"/>
+          </a:solidFill>
+          <a:ln xmlns:a="http://schemas.openxmlformats.org/drawingml/2006/main" w="0">
+            <a:noFill/>
+          </a:ln>
+        </p:spPr>
+      </p:sp>
+      <p:sp>
+        <p:nvSpPr>
+          <p:cNvPr id="23" name="">
+            <a:extLst xmlns:a="http://schemas.openxmlformats.org/drawingml/2006/main">
+              <a:ext uri="{FF2B5EF4-FFF2-40B4-BE49-F238E27FC236}">
+                <a16:creationId xmlns:a16="http://schemas.microsoft.com/office/drawing/2014/main" id="{80F60F2F-A829-4FC1-95AB-7D8082825971}"/>
+              </a:ext>
+            </a:extLst>
+          </p:cNvPr>
+          <p:cNvSpPr>
+            <a:spLocks xmlns:a="http://schemas.openxmlformats.org/drawingml/2006/main" noGrp="1"/>
+          </p:cNvSpPr>
+          <p:nvPr/>
+        </p:nvSpPr>
+        <p:spPr>
+          <a:xfrm xmlns:a="http://schemas.openxmlformats.org/drawingml/2006/main">
+            <a:off x="857250" y="4257675"/>
+            <a:ext cx="342900" cy="285750"/>
+          </a:xfrm>
+          <a:prstGeom xmlns:a="http://schemas.openxmlformats.org/drawingml/2006/main" prst="rect">
+            <a:avLst/>
+          </a:prstGeom>
+          <a:noFill xmlns:a="http://schemas.openxmlformats.org/drawingml/2006/main"/>
+          <a:ln xmlns:a="http://schemas.openxmlformats.org/drawingml/2006/main" w="0">
+            <a:noFill/>
+          </a:ln>
+        </p:spPr>
         <p:txBody>
-          <a:bodyPr xmlns:a="http://schemas.openxmlformats.org/drawingml/2006/main" lIns="142875" tIns="114300" rIns="142875" bIns="0" anchor="t">
+          <a:bodyPr xmlns:a="http://schemas.openxmlformats.org/drawingml/2006/main" lIns="0" tIns="0" rIns="0" bIns="0" anchor="t">
+            <a:noAutofit/>
+          </a:bodyPr>
+          <a:lstStyle xmlns:a="http://schemas.openxmlformats.org/drawingml/2006/main"/>
+          <a:p xmlns:a="http://schemas.openxmlformats.org/drawingml/2006/main">
+            <a:pPr>
+              <a:defRPr sz="1350" b="1">
+                <a:solidFill>
+                  <a:srgbClr val="263C3A"/>
+                </a:solidFill>
+                <a:latin typeface="DejaVu Sans"/>
+                <a:ea typeface="DejaVu Sans"/>
+                <a:cs typeface="DejaVu Sans"/>
+              </a:defRPr>
+            </a:pPr>
+            <a:r>
+              <a:rPr sz="1350" b="1">
+                <a:solidFill>
+                  <a:srgbClr val="263C3A"/>
+                </a:solidFill>
+                <a:latin typeface="DejaVu Sans"/>
+                <a:ea typeface="DejaVu Sans"/>
+                <a:cs typeface="DejaVu Sans"/>
+              </a:rPr>
+              <a:t>04</a:t>
+            </a:r>
+          </a:p>
+        </p:txBody>
+      </p:sp>
+      <p:sp>
+        <p:nvSpPr>
+          <p:cNvPr id="24" name="">
+            <a:extLst xmlns:a="http://schemas.openxmlformats.org/drawingml/2006/main">
+              <a:ext uri="{FF2B5EF4-FFF2-40B4-BE49-F238E27FC236}">
+                <a16:creationId xmlns:a16="http://schemas.microsoft.com/office/drawing/2014/main" id="{F5CFC2C1-0885-4B2F-9A7C-115BE6CF470B}"/>
+              </a:ext>
+            </a:extLst>
+          </p:cNvPr>
+          <p:cNvSpPr>
+            <a:spLocks xmlns:a="http://schemas.openxmlformats.org/drawingml/2006/main" noGrp="1"/>
+          </p:cNvSpPr>
+          <p:nvPr/>
+        </p:nvSpPr>
+        <p:spPr>
+          <a:xfrm xmlns:a="http://schemas.openxmlformats.org/drawingml/2006/main">
+            <a:off x="1352550" y="4238625"/>
+            <a:ext cx="2609850" cy="428625"/>
+          </a:xfrm>
+          <a:prstGeom xmlns:a="http://schemas.openxmlformats.org/drawingml/2006/main" prst="rect">
+            <a:avLst/>
+          </a:prstGeom>
+          <a:noFill xmlns:a="http://schemas.openxmlformats.org/drawingml/2006/main"/>
+          <a:ln xmlns:a="http://schemas.openxmlformats.org/drawingml/2006/main" w="0">
+            <a:noFill/>
+          </a:ln>
+        </p:spPr>
+        <p:txBody>
+          <a:bodyPr xmlns:a="http://schemas.openxmlformats.org/drawingml/2006/main" lIns="0" tIns="0" rIns="0" bIns="0" anchor="t">
+            <a:noAutofit/>
+          </a:bodyPr>
+          <a:lstStyle xmlns:a="http://schemas.openxmlformats.org/drawingml/2006/main"/>
+          <a:p xmlns:a="http://schemas.openxmlformats.org/drawingml/2006/main">
+            <a:pPr>
+              <a:defRPr sz="1725" b="1">
+                <a:solidFill>
+                  <a:srgbClr val="263C3A"/>
+                </a:solidFill>
+                <a:latin typeface="DejaVu Sans"/>
+                <a:ea typeface="DejaVu Sans"/>
+                <a:cs typeface="DejaVu Sans"/>
+              </a:defRPr>
+            </a:pPr>
+            <a:r>
+              <a:rPr sz="1725" b="1">
+                <a:solidFill>
+                  <a:srgbClr val="263C3A"/>
+                </a:solidFill>
+                <a:latin typeface="DejaVu Sans"/>
+                <a:ea typeface="DejaVu Sans"/>
+                <a:cs typeface="DejaVu Sans"/>
+              </a:rPr>
+              <a:t>Roll 4</a:t>
+            </a:r>
+          </a:p>
+        </p:txBody>
+      </p:sp>
+      <p:sp>
+        <p:nvSpPr>
+          <p:cNvPr id="25" name="">
+            <a:extLst xmlns:a="http://schemas.openxmlformats.org/drawingml/2006/main">
+              <a:ext uri="{FF2B5EF4-FFF2-40B4-BE49-F238E27FC236}">
+                <a16:creationId xmlns:a16="http://schemas.microsoft.com/office/drawing/2014/main" id="{B52E6F05-338E-47F7-B724-8D19D9FD9BEA}"/>
+              </a:ext>
+            </a:extLst>
+          </p:cNvPr>
+          <p:cNvSpPr>
+            <a:spLocks xmlns:a="http://schemas.openxmlformats.org/drawingml/2006/main" noGrp="1"/>
+          </p:cNvSpPr>
+          <p:nvPr/>
+        </p:nvSpPr>
+        <p:spPr>
+          <a:xfrm xmlns:a="http://schemas.openxmlformats.org/drawingml/2006/main">
+            <a:off x="819150" y="4762500"/>
+            <a:ext cx="3124200" cy="695325"/>
+          </a:xfrm>
+          <a:prstGeom xmlns:a="http://schemas.openxmlformats.org/drawingml/2006/main" prst="rect">
+            <a:avLst/>
+          </a:prstGeom>
+          <a:noFill xmlns:a="http://schemas.openxmlformats.org/drawingml/2006/main"/>
+          <a:ln xmlns:a="http://schemas.openxmlformats.org/drawingml/2006/main" w="0">
+            <a:noFill/>
+          </a:ln>
+        </p:spPr>
+        <p:txBody>
+          <a:bodyPr xmlns:a="http://schemas.openxmlformats.org/drawingml/2006/main" lIns="0" tIns="0" rIns="0" bIns="0" anchor="t">
             <a:noAutofit/>
           </a:bodyPr>
           <a:lstStyle xmlns:a="http://schemas.openxmlformats.org/drawingml/2006/main"/>
@@ -3237,33 +3995,33 @@
             <a:pPr>
               <a:defRPr sz="1950" b="0">
                 <a:solidFill>
-                  <a:srgbClr val="42473D"/>
+                  <a:srgbClr val="687572"/>
                 </a:solidFill>
-                <a:latin typeface="Arial"/>
-                <a:ea typeface="Arial"/>
-                <a:cs typeface="Arial"/>
+                <a:latin typeface="DejaVu Sans"/>
+                <a:ea typeface="DejaVu Sans"/>
+                <a:cs typeface="DejaVu Sans"/>
               </a:defRPr>
             </a:pPr>
             <a:r>
               <a:rPr sz="1950" b="0">
                 <a:solidFill>
-                  <a:srgbClr val="42473D"/>
+                  <a:srgbClr val="687572"/>
                 </a:solidFill>
-                <a:latin typeface="Arial"/>
-                <a:ea typeface="Arial"/>
-                <a:cs typeface="Arial"/>
+                <a:latin typeface="DejaVu Sans"/>
+                <a:ea typeface="DejaVu Sans"/>
+                <a:cs typeface="DejaVu Sans"/>
               </a:rPr>
-              <a:t>4. [Add a prompt]</a:t>
+              <a:t>[Your prompt]</a:t>
             </a:r>
           </a:p>
         </p:txBody>
       </p:sp>
       <p:sp>
         <p:nvSpPr>
-          <p:cNvPr id="8" name="">
-            <a:extLst xmlns:a="http://schemas.openxmlformats.org/drawingml/2006/main">
-              <a:ext uri="{FF2B5EF4-FFF2-40B4-BE49-F238E27FC236}">
-                <a16:creationId xmlns:a16="http://schemas.microsoft.com/office/drawing/2014/main" id="{0772C4CE-FF59-4918-9756-D3C3994A127A}"/>
+          <p:cNvPr id="26" name="">
+            <a:extLst xmlns:a="http://schemas.openxmlformats.org/drawingml/2006/main">
+              <a:ext uri="{FF2B5EF4-FFF2-40B4-BE49-F238E27FC236}">
+                <a16:creationId xmlns:a16="http://schemas.microsoft.com/office/drawing/2014/main" id="{E31C5D1E-FACB-42B4-821A-4795C2E37CAD}"/>
               </a:ext>
             </a:extLst>
           </p:cNvPr>
@@ -3274,21 +4032,195 @@
         </p:nvSpPr>
         <p:spPr>
           <a:xfrm xmlns:a="http://schemas.openxmlformats.org/drawingml/2006/main">
-            <a:off x="4324350" y="3943350"/>
-            <a:ext cx="3543300" cy="1581150"/>
-          </a:xfrm>
-          <a:prstGeom xmlns:a="http://schemas.openxmlformats.org/drawingml/2006/main" prst="rect">
-            <a:avLst/>
-          </a:prstGeom>
-          <a:noFill xmlns:a="http://schemas.openxmlformats.org/drawingml/2006/main"/>
+            <a:off x="4324350" y="4019550"/>
+            <a:ext cx="3543300" cy="1600200"/>
+          </a:xfrm>
+          <a:prstGeom xmlns:a="http://schemas.openxmlformats.org/drawingml/2006/main" prst="rect">
+            <a:avLst/>
+          </a:prstGeom>
+          <a:solidFill xmlns:a="http://schemas.openxmlformats.org/drawingml/2006/main">
+            <a:srgbClr val="EDF2F5"/>
+          </a:solidFill>
           <a:ln xmlns:a="http://schemas.openxmlformats.org/drawingml/2006/main" w="9525">
             <a:solidFill>
-              <a:srgbClr val="CBD0C4"/>
+              <a:srgbClr val="D4DFDB"/>
             </a:solidFill>
           </a:ln>
         </p:spPr>
+      </p:sp>
+      <p:sp>
+        <p:nvSpPr>
+          <p:cNvPr id="27" name="">
+            <a:extLst xmlns:a="http://schemas.openxmlformats.org/drawingml/2006/main">
+              <a:ext uri="{FF2B5EF4-FFF2-40B4-BE49-F238E27FC236}">
+                <a16:creationId xmlns:a16="http://schemas.microsoft.com/office/drawing/2014/main" id="{06E1BD78-3E80-4E62-AA01-74A84089E750}"/>
+              </a:ext>
+            </a:extLst>
+          </p:cNvPr>
+          <p:cNvSpPr>
+            <a:spLocks xmlns:a="http://schemas.openxmlformats.org/drawingml/2006/main" noGrp="1"/>
+          </p:cNvSpPr>
+          <p:nvPr/>
+        </p:nvSpPr>
+        <p:spPr>
+          <a:xfrm xmlns:a="http://schemas.openxmlformats.org/drawingml/2006/main">
+            <a:off x="4514850" y="4191000"/>
+            <a:ext cx="381000" cy="381000"/>
+          </a:xfrm>
+          <a:prstGeom xmlns:a="http://schemas.openxmlformats.org/drawingml/2006/main" prst="ellipse">
+            <a:avLst/>
+          </a:prstGeom>
+          <a:solidFill xmlns:a="http://schemas.openxmlformats.org/drawingml/2006/main">
+            <a:srgbClr val="FFFFFF"/>
+          </a:solidFill>
+          <a:ln xmlns:a="http://schemas.openxmlformats.org/drawingml/2006/main" w="0">
+            <a:noFill/>
+          </a:ln>
+        </p:spPr>
+      </p:sp>
+      <p:sp>
+        <p:nvSpPr>
+          <p:cNvPr id="28" name="">
+            <a:extLst xmlns:a="http://schemas.openxmlformats.org/drawingml/2006/main">
+              <a:ext uri="{FF2B5EF4-FFF2-40B4-BE49-F238E27FC236}">
+                <a16:creationId xmlns:a16="http://schemas.microsoft.com/office/drawing/2014/main" id="{9102FF69-F4F2-44BA-AFE5-9A6D553ACBD5}"/>
+              </a:ext>
+            </a:extLst>
+          </p:cNvPr>
+          <p:cNvSpPr>
+            <a:spLocks xmlns:a="http://schemas.openxmlformats.org/drawingml/2006/main" noGrp="1"/>
+          </p:cNvSpPr>
+          <p:nvPr/>
+        </p:nvSpPr>
+        <p:spPr>
+          <a:xfrm xmlns:a="http://schemas.openxmlformats.org/drawingml/2006/main">
+            <a:off x="4572000" y="4257675"/>
+            <a:ext cx="342900" cy="285750"/>
+          </a:xfrm>
+          <a:prstGeom xmlns:a="http://schemas.openxmlformats.org/drawingml/2006/main" prst="rect">
+            <a:avLst/>
+          </a:prstGeom>
+          <a:noFill xmlns:a="http://schemas.openxmlformats.org/drawingml/2006/main"/>
+          <a:ln xmlns:a="http://schemas.openxmlformats.org/drawingml/2006/main" w="0">
+            <a:noFill/>
+          </a:ln>
+        </p:spPr>
         <p:txBody>
-          <a:bodyPr xmlns:a="http://schemas.openxmlformats.org/drawingml/2006/main" lIns="142875" tIns="114300" rIns="142875" bIns="0" anchor="t">
+          <a:bodyPr xmlns:a="http://schemas.openxmlformats.org/drawingml/2006/main" lIns="0" tIns="0" rIns="0" bIns="0" anchor="t">
+            <a:noAutofit/>
+          </a:bodyPr>
+          <a:lstStyle xmlns:a="http://schemas.openxmlformats.org/drawingml/2006/main"/>
+          <a:p xmlns:a="http://schemas.openxmlformats.org/drawingml/2006/main">
+            <a:pPr>
+              <a:defRPr sz="1350" b="1">
+                <a:solidFill>
+                  <a:srgbClr val="263C3A"/>
+                </a:solidFill>
+                <a:latin typeface="DejaVu Sans"/>
+                <a:ea typeface="DejaVu Sans"/>
+                <a:cs typeface="DejaVu Sans"/>
+              </a:defRPr>
+            </a:pPr>
+            <a:r>
+              <a:rPr sz="1350" b="1">
+                <a:solidFill>
+                  <a:srgbClr val="263C3A"/>
+                </a:solidFill>
+                <a:latin typeface="DejaVu Sans"/>
+                <a:ea typeface="DejaVu Sans"/>
+                <a:cs typeface="DejaVu Sans"/>
+              </a:rPr>
+              <a:t>05</a:t>
+            </a:r>
+          </a:p>
+        </p:txBody>
+      </p:sp>
+      <p:sp>
+        <p:nvSpPr>
+          <p:cNvPr id="29" name="">
+            <a:extLst xmlns:a="http://schemas.openxmlformats.org/drawingml/2006/main">
+              <a:ext uri="{FF2B5EF4-FFF2-40B4-BE49-F238E27FC236}">
+                <a16:creationId xmlns:a16="http://schemas.microsoft.com/office/drawing/2014/main" id="{26ADE839-868F-41BF-8F0E-E93D16AA9CB1}"/>
+              </a:ext>
+            </a:extLst>
+          </p:cNvPr>
+          <p:cNvSpPr>
+            <a:spLocks xmlns:a="http://schemas.openxmlformats.org/drawingml/2006/main" noGrp="1"/>
+          </p:cNvSpPr>
+          <p:nvPr/>
+        </p:nvSpPr>
+        <p:spPr>
+          <a:xfrm xmlns:a="http://schemas.openxmlformats.org/drawingml/2006/main">
+            <a:off x="5067300" y="4238625"/>
+            <a:ext cx="2609850" cy="428625"/>
+          </a:xfrm>
+          <a:prstGeom xmlns:a="http://schemas.openxmlformats.org/drawingml/2006/main" prst="rect">
+            <a:avLst/>
+          </a:prstGeom>
+          <a:noFill xmlns:a="http://schemas.openxmlformats.org/drawingml/2006/main"/>
+          <a:ln xmlns:a="http://schemas.openxmlformats.org/drawingml/2006/main" w="0">
+            <a:noFill/>
+          </a:ln>
+        </p:spPr>
+        <p:txBody>
+          <a:bodyPr xmlns:a="http://schemas.openxmlformats.org/drawingml/2006/main" lIns="0" tIns="0" rIns="0" bIns="0" anchor="t">
+            <a:noAutofit/>
+          </a:bodyPr>
+          <a:lstStyle xmlns:a="http://schemas.openxmlformats.org/drawingml/2006/main"/>
+          <a:p xmlns:a="http://schemas.openxmlformats.org/drawingml/2006/main">
+            <a:pPr>
+              <a:defRPr sz="1725" b="1">
+                <a:solidFill>
+                  <a:srgbClr val="263C3A"/>
+                </a:solidFill>
+                <a:latin typeface="DejaVu Sans"/>
+                <a:ea typeface="DejaVu Sans"/>
+                <a:cs typeface="DejaVu Sans"/>
+              </a:defRPr>
+            </a:pPr>
+            <a:r>
+              <a:rPr sz="1725" b="1">
+                <a:solidFill>
+                  <a:srgbClr val="263C3A"/>
+                </a:solidFill>
+                <a:latin typeface="DejaVu Sans"/>
+                <a:ea typeface="DejaVu Sans"/>
+                <a:cs typeface="DejaVu Sans"/>
+              </a:rPr>
+              <a:t>Roll 5</a:t>
+            </a:r>
+          </a:p>
+        </p:txBody>
+      </p:sp>
+      <p:sp>
+        <p:nvSpPr>
+          <p:cNvPr id="30" name="">
+            <a:extLst xmlns:a="http://schemas.openxmlformats.org/drawingml/2006/main">
+              <a:ext uri="{FF2B5EF4-FFF2-40B4-BE49-F238E27FC236}">
+                <a16:creationId xmlns:a16="http://schemas.microsoft.com/office/drawing/2014/main" id="{5D0F5389-31E2-419E-8DF8-048CC613B558}"/>
+              </a:ext>
+            </a:extLst>
+          </p:cNvPr>
+          <p:cNvSpPr>
+            <a:spLocks xmlns:a="http://schemas.openxmlformats.org/drawingml/2006/main" noGrp="1"/>
+          </p:cNvSpPr>
+          <p:nvPr/>
+        </p:nvSpPr>
+        <p:spPr>
+          <a:xfrm xmlns:a="http://schemas.openxmlformats.org/drawingml/2006/main">
+            <a:off x="4533900" y="4762500"/>
+            <a:ext cx="3124200" cy="695325"/>
+          </a:xfrm>
+          <a:prstGeom xmlns:a="http://schemas.openxmlformats.org/drawingml/2006/main" prst="rect">
+            <a:avLst/>
+          </a:prstGeom>
+          <a:noFill xmlns:a="http://schemas.openxmlformats.org/drawingml/2006/main"/>
+          <a:ln xmlns:a="http://schemas.openxmlformats.org/drawingml/2006/main" w="0">
+            <a:noFill/>
+          </a:ln>
+        </p:spPr>
+        <p:txBody>
+          <a:bodyPr xmlns:a="http://schemas.openxmlformats.org/drawingml/2006/main" lIns="0" tIns="0" rIns="0" bIns="0" anchor="t">
             <a:noAutofit/>
           </a:bodyPr>
           <a:lstStyle xmlns:a="http://schemas.openxmlformats.org/drawingml/2006/main"/>
@@ -3296,33 +4228,33 @@
             <a:pPr>
               <a:defRPr sz="1950" b="0">
                 <a:solidFill>
-                  <a:srgbClr val="42473D"/>
+                  <a:srgbClr val="687572"/>
                 </a:solidFill>
-                <a:latin typeface="Arial"/>
-                <a:ea typeface="Arial"/>
-                <a:cs typeface="Arial"/>
+                <a:latin typeface="DejaVu Sans"/>
+                <a:ea typeface="DejaVu Sans"/>
+                <a:cs typeface="DejaVu Sans"/>
               </a:defRPr>
             </a:pPr>
             <a:r>
               <a:rPr sz="1950" b="0">
                 <a:solidFill>
-                  <a:srgbClr val="42473D"/>
+                  <a:srgbClr val="687572"/>
                 </a:solidFill>
-                <a:latin typeface="Arial"/>
-                <a:ea typeface="Arial"/>
-                <a:cs typeface="Arial"/>
+                <a:latin typeface="DejaVu Sans"/>
+                <a:ea typeface="DejaVu Sans"/>
+                <a:cs typeface="DejaVu Sans"/>
               </a:rPr>
-              <a:t>5. [Add a prompt]</a:t>
+              <a:t>[Your prompt]</a:t>
             </a:r>
           </a:p>
         </p:txBody>
       </p:sp>
       <p:sp>
         <p:nvSpPr>
-          <p:cNvPr id="9" name="">
-            <a:extLst xmlns:a="http://schemas.openxmlformats.org/drawingml/2006/main">
-              <a:ext uri="{FF2B5EF4-FFF2-40B4-BE49-F238E27FC236}">
-                <a16:creationId xmlns:a16="http://schemas.microsoft.com/office/drawing/2014/main" id="{F4E80E6E-4520-4D38-BDE6-CFB274BF9050}"/>
+          <p:cNvPr id="31" name="">
+            <a:extLst xmlns:a="http://schemas.openxmlformats.org/drawingml/2006/main">
+              <a:ext uri="{FF2B5EF4-FFF2-40B4-BE49-F238E27FC236}">
+                <a16:creationId xmlns:a16="http://schemas.microsoft.com/office/drawing/2014/main" id="{D0A8C018-FA50-407A-BC1E-8B38DA26F1A1}"/>
               </a:ext>
             </a:extLst>
           </p:cNvPr>
@@ -3333,21 +4265,195 @@
         </p:nvSpPr>
         <p:spPr>
           <a:xfrm xmlns:a="http://schemas.openxmlformats.org/drawingml/2006/main">
-            <a:off x="8039100" y="3943350"/>
-            <a:ext cx="3543300" cy="1581150"/>
-          </a:xfrm>
-          <a:prstGeom xmlns:a="http://schemas.openxmlformats.org/drawingml/2006/main" prst="rect">
-            <a:avLst/>
-          </a:prstGeom>
-          <a:noFill xmlns:a="http://schemas.openxmlformats.org/drawingml/2006/main"/>
+            <a:off x="8039100" y="4019550"/>
+            <a:ext cx="3543300" cy="1600200"/>
+          </a:xfrm>
+          <a:prstGeom xmlns:a="http://schemas.openxmlformats.org/drawingml/2006/main" prst="rect">
+            <a:avLst/>
+          </a:prstGeom>
+          <a:solidFill xmlns:a="http://schemas.openxmlformats.org/drawingml/2006/main">
+            <a:srgbClr val="EAF1EC"/>
+          </a:solidFill>
           <a:ln xmlns:a="http://schemas.openxmlformats.org/drawingml/2006/main" w="9525">
             <a:solidFill>
-              <a:srgbClr val="CBD0C4"/>
+              <a:srgbClr val="D4DFDB"/>
             </a:solidFill>
           </a:ln>
         </p:spPr>
+      </p:sp>
+      <p:sp>
+        <p:nvSpPr>
+          <p:cNvPr id="32" name="">
+            <a:extLst xmlns:a="http://schemas.openxmlformats.org/drawingml/2006/main">
+              <a:ext uri="{FF2B5EF4-FFF2-40B4-BE49-F238E27FC236}">
+                <a16:creationId xmlns:a16="http://schemas.microsoft.com/office/drawing/2014/main" id="{5F8BBC94-E052-4680-AE82-B55DD157BDA9}"/>
+              </a:ext>
+            </a:extLst>
+          </p:cNvPr>
+          <p:cNvSpPr>
+            <a:spLocks xmlns:a="http://schemas.openxmlformats.org/drawingml/2006/main" noGrp="1"/>
+          </p:cNvSpPr>
+          <p:nvPr/>
+        </p:nvSpPr>
+        <p:spPr>
+          <a:xfrm xmlns:a="http://schemas.openxmlformats.org/drawingml/2006/main">
+            <a:off x="8229600" y="4191000"/>
+            <a:ext cx="381000" cy="381000"/>
+          </a:xfrm>
+          <a:prstGeom xmlns:a="http://schemas.openxmlformats.org/drawingml/2006/main" prst="ellipse">
+            <a:avLst/>
+          </a:prstGeom>
+          <a:solidFill xmlns:a="http://schemas.openxmlformats.org/drawingml/2006/main">
+            <a:srgbClr val="FFFFFF"/>
+          </a:solidFill>
+          <a:ln xmlns:a="http://schemas.openxmlformats.org/drawingml/2006/main" w="0">
+            <a:noFill/>
+          </a:ln>
+        </p:spPr>
+      </p:sp>
+      <p:sp>
+        <p:nvSpPr>
+          <p:cNvPr id="33" name="">
+            <a:extLst xmlns:a="http://schemas.openxmlformats.org/drawingml/2006/main">
+              <a:ext uri="{FF2B5EF4-FFF2-40B4-BE49-F238E27FC236}">
+                <a16:creationId xmlns:a16="http://schemas.microsoft.com/office/drawing/2014/main" id="{40EA764B-7C96-4AE6-9EF2-78739556B106}"/>
+              </a:ext>
+            </a:extLst>
+          </p:cNvPr>
+          <p:cNvSpPr>
+            <a:spLocks xmlns:a="http://schemas.openxmlformats.org/drawingml/2006/main" noGrp="1"/>
+          </p:cNvSpPr>
+          <p:nvPr/>
+        </p:nvSpPr>
+        <p:spPr>
+          <a:xfrm xmlns:a="http://schemas.openxmlformats.org/drawingml/2006/main">
+            <a:off x="8286750" y="4257675"/>
+            <a:ext cx="342900" cy="285750"/>
+          </a:xfrm>
+          <a:prstGeom xmlns:a="http://schemas.openxmlformats.org/drawingml/2006/main" prst="rect">
+            <a:avLst/>
+          </a:prstGeom>
+          <a:noFill xmlns:a="http://schemas.openxmlformats.org/drawingml/2006/main"/>
+          <a:ln xmlns:a="http://schemas.openxmlformats.org/drawingml/2006/main" w="0">
+            <a:noFill/>
+          </a:ln>
+        </p:spPr>
         <p:txBody>
-          <a:bodyPr xmlns:a="http://schemas.openxmlformats.org/drawingml/2006/main" lIns="142875" tIns="114300" rIns="142875" bIns="0" anchor="t">
+          <a:bodyPr xmlns:a="http://schemas.openxmlformats.org/drawingml/2006/main" lIns="0" tIns="0" rIns="0" bIns="0" anchor="t">
+            <a:noAutofit/>
+          </a:bodyPr>
+          <a:lstStyle xmlns:a="http://schemas.openxmlformats.org/drawingml/2006/main"/>
+          <a:p xmlns:a="http://schemas.openxmlformats.org/drawingml/2006/main">
+            <a:pPr>
+              <a:defRPr sz="1350" b="1">
+                <a:solidFill>
+                  <a:srgbClr val="263C3A"/>
+                </a:solidFill>
+                <a:latin typeface="DejaVu Sans"/>
+                <a:ea typeface="DejaVu Sans"/>
+                <a:cs typeface="DejaVu Sans"/>
+              </a:defRPr>
+            </a:pPr>
+            <a:r>
+              <a:rPr sz="1350" b="1">
+                <a:solidFill>
+                  <a:srgbClr val="263C3A"/>
+                </a:solidFill>
+                <a:latin typeface="DejaVu Sans"/>
+                <a:ea typeface="DejaVu Sans"/>
+                <a:cs typeface="DejaVu Sans"/>
+              </a:rPr>
+              <a:t>06</a:t>
+            </a:r>
+          </a:p>
+        </p:txBody>
+      </p:sp>
+      <p:sp>
+        <p:nvSpPr>
+          <p:cNvPr id="34" name="">
+            <a:extLst xmlns:a="http://schemas.openxmlformats.org/drawingml/2006/main">
+              <a:ext uri="{FF2B5EF4-FFF2-40B4-BE49-F238E27FC236}">
+                <a16:creationId xmlns:a16="http://schemas.microsoft.com/office/drawing/2014/main" id="{C4EEB318-2EBD-45C2-B819-5AB75ABA9545}"/>
+              </a:ext>
+            </a:extLst>
+          </p:cNvPr>
+          <p:cNvSpPr>
+            <a:spLocks xmlns:a="http://schemas.openxmlformats.org/drawingml/2006/main" noGrp="1"/>
+          </p:cNvSpPr>
+          <p:nvPr/>
+        </p:nvSpPr>
+        <p:spPr>
+          <a:xfrm xmlns:a="http://schemas.openxmlformats.org/drawingml/2006/main">
+            <a:off x="8782050" y="4238625"/>
+            <a:ext cx="2609850" cy="428625"/>
+          </a:xfrm>
+          <a:prstGeom xmlns:a="http://schemas.openxmlformats.org/drawingml/2006/main" prst="rect">
+            <a:avLst/>
+          </a:prstGeom>
+          <a:noFill xmlns:a="http://schemas.openxmlformats.org/drawingml/2006/main"/>
+          <a:ln xmlns:a="http://schemas.openxmlformats.org/drawingml/2006/main" w="0">
+            <a:noFill/>
+          </a:ln>
+        </p:spPr>
+        <p:txBody>
+          <a:bodyPr xmlns:a="http://schemas.openxmlformats.org/drawingml/2006/main" lIns="0" tIns="0" rIns="0" bIns="0" anchor="t">
+            <a:noAutofit/>
+          </a:bodyPr>
+          <a:lstStyle xmlns:a="http://schemas.openxmlformats.org/drawingml/2006/main"/>
+          <a:p xmlns:a="http://schemas.openxmlformats.org/drawingml/2006/main">
+            <a:pPr>
+              <a:defRPr sz="1725" b="1">
+                <a:solidFill>
+                  <a:srgbClr val="263C3A"/>
+                </a:solidFill>
+                <a:latin typeface="DejaVu Sans"/>
+                <a:ea typeface="DejaVu Sans"/>
+                <a:cs typeface="DejaVu Sans"/>
+              </a:defRPr>
+            </a:pPr>
+            <a:r>
+              <a:rPr sz="1725" b="1">
+                <a:solidFill>
+                  <a:srgbClr val="263C3A"/>
+                </a:solidFill>
+                <a:latin typeface="DejaVu Sans"/>
+                <a:ea typeface="DejaVu Sans"/>
+                <a:cs typeface="DejaVu Sans"/>
+              </a:rPr>
+              <a:t>Roll 6</a:t>
+            </a:r>
+          </a:p>
+        </p:txBody>
+      </p:sp>
+      <p:sp>
+        <p:nvSpPr>
+          <p:cNvPr id="35" name="">
+            <a:extLst xmlns:a="http://schemas.openxmlformats.org/drawingml/2006/main">
+              <a:ext uri="{FF2B5EF4-FFF2-40B4-BE49-F238E27FC236}">
+                <a16:creationId xmlns:a16="http://schemas.microsoft.com/office/drawing/2014/main" id="{F83BFA56-21ED-47F3-AD86-F0255C3C8CD7}"/>
+              </a:ext>
+            </a:extLst>
+          </p:cNvPr>
+          <p:cNvSpPr>
+            <a:spLocks xmlns:a="http://schemas.openxmlformats.org/drawingml/2006/main" noGrp="1"/>
+          </p:cNvSpPr>
+          <p:nvPr/>
+        </p:nvSpPr>
+        <p:spPr>
+          <a:xfrm xmlns:a="http://schemas.openxmlformats.org/drawingml/2006/main">
+            <a:off x="8248650" y="4762500"/>
+            <a:ext cx="3124200" cy="695325"/>
+          </a:xfrm>
+          <a:prstGeom xmlns:a="http://schemas.openxmlformats.org/drawingml/2006/main" prst="rect">
+            <a:avLst/>
+          </a:prstGeom>
+          <a:noFill xmlns:a="http://schemas.openxmlformats.org/drawingml/2006/main"/>
+          <a:ln xmlns:a="http://schemas.openxmlformats.org/drawingml/2006/main" w="0">
+            <a:noFill/>
+          </a:ln>
+        </p:spPr>
+        <p:txBody>
+          <a:bodyPr xmlns:a="http://schemas.openxmlformats.org/drawingml/2006/main" lIns="0" tIns="0" rIns="0" bIns="0" anchor="t">
             <a:noAutofit/>
           </a:bodyPr>
           <a:lstStyle xmlns:a="http://schemas.openxmlformats.org/drawingml/2006/main"/>
@@ -3355,33 +4461,33 @@
             <a:pPr>
               <a:defRPr sz="1950" b="0">
                 <a:solidFill>
-                  <a:srgbClr val="42473D"/>
+                  <a:srgbClr val="687572"/>
                 </a:solidFill>
-                <a:latin typeface="Arial"/>
-                <a:ea typeface="Arial"/>
-                <a:cs typeface="Arial"/>
+                <a:latin typeface="DejaVu Sans"/>
+                <a:ea typeface="DejaVu Sans"/>
+                <a:cs typeface="DejaVu Sans"/>
               </a:defRPr>
             </a:pPr>
             <a:r>
               <a:rPr sz="1950" b="0">
                 <a:solidFill>
-                  <a:srgbClr val="42473D"/>
+                  <a:srgbClr val="687572"/>
                 </a:solidFill>
-                <a:latin typeface="Arial"/>
-                <a:ea typeface="Arial"/>
-                <a:cs typeface="Arial"/>
+                <a:latin typeface="DejaVu Sans"/>
+                <a:ea typeface="DejaVu Sans"/>
+                <a:cs typeface="DejaVu Sans"/>
               </a:rPr>
-              <a:t>6. [Add a prompt]</a:t>
+              <a:t>[Your prompt]</a:t>
             </a:r>
           </a:p>
         </p:txBody>
       </p:sp>
       <p:sp>
         <p:nvSpPr>
-          <p:cNvPr id="10" name="">
-            <a:extLst xmlns:a="http://schemas.openxmlformats.org/drawingml/2006/main">
-              <a:ext uri="{FF2B5EF4-FFF2-40B4-BE49-F238E27FC236}">
-                <a16:creationId xmlns:a16="http://schemas.microsoft.com/office/drawing/2014/main" id="{2A0E6CFC-2081-47FB-9594-489CFDA6136C}"/>
+          <p:cNvPr id="36" name="">
+            <a:extLst xmlns:a="http://schemas.openxmlformats.org/drawingml/2006/main">
+              <a:ext uri="{FF2B5EF4-FFF2-40B4-BE49-F238E27FC236}">
+                <a16:creationId xmlns:a16="http://schemas.microsoft.com/office/drawing/2014/main" id="{8C969299-BD50-4EFE-8B30-45053087A9D6}"/>
               </a:ext>
             </a:extLst>
           </p:cNvPr>
@@ -3393,7 +4499,37 @@
         <p:spPr>
           <a:xfrm xmlns:a="http://schemas.openxmlformats.org/drawingml/2006/main">
             <a:off x="609600" y="5953125"/>
-            <a:ext cx="10972800" cy="381000"/>
+            <a:ext cx="10972800" cy="9525"/>
+          </a:xfrm>
+          <a:prstGeom xmlns:a="http://schemas.openxmlformats.org/drawingml/2006/main" prst="rect">
+            <a:avLst/>
+          </a:prstGeom>
+          <a:solidFill xmlns:a="http://schemas.openxmlformats.org/drawingml/2006/main">
+            <a:srgbClr val="A9BDB7"/>
+          </a:solidFill>
+          <a:ln xmlns:a="http://schemas.openxmlformats.org/drawingml/2006/main" w="0">
+            <a:noFill/>
+          </a:ln>
+        </p:spPr>
+      </p:sp>
+      <p:sp>
+        <p:nvSpPr>
+          <p:cNvPr id="37" name="">
+            <a:extLst xmlns:a="http://schemas.openxmlformats.org/drawingml/2006/main">
+              <a:ext uri="{FF2B5EF4-FFF2-40B4-BE49-F238E27FC236}">
+                <a16:creationId xmlns:a16="http://schemas.microsoft.com/office/drawing/2014/main" id="{C5239E73-F7B9-463A-A943-A6CFB4CD9F8C}"/>
+              </a:ext>
+            </a:extLst>
+          </p:cNvPr>
+          <p:cNvSpPr>
+            <a:spLocks xmlns:a="http://schemas.openxmlformats.org/drawingml/2006/main" noGrp="1"/>
+          </p:cNvSpPr>
+          <p:nvPr/>
+        </p:nvSpPr>
+        <p:spPr>
+          <a:xfrm xmlns:a="http://schemas.openxmlformats.org/drawingml/2006/main">
+            <a:off x="609600" y="6191250"/>
+            <a:ext cx="3238500" cy="361950"/>
           </a:xfrm>
           <a:prstGeom xmlns:a="http://schemas.openxmlformats.org/drawingml/2006/main" prst="rect">
             <a:avLst/>
@@ -3410,35 +4546,35 @@
           <a:lstStyle xmlns:a="http://schemas.openxmlformats.org/drawingml/2006/main"/>
           <a:p xmlns:a="http://schemas.openxmlformats.org/drawingml/2006/main">
             <a:pPr>
-              <a:defRPr sz="1800" b="0">
+              <a:defRPr sz="1650" b="0">
                 <a:solidFill>
-                  <a:srgbClr val="28534A"/>
+                  <a:srgbClr val="687572"/>
                 </a:solidFill>
-                <a:latin typeface="Arial"/>
-                <a:ea typeface="Arial"/>
-                <a:cs typeface="Arial"/>
+                <a:latin typeface="DejaVu Sans"/>
+                <a:ea typeface="DejaVu Sans"/>
+                <a:cs typeface="DejaVu Sans"/>
               </a:defRPr>
             </a:pPr>
             <a:r>
-              <a:rPr sz="1800" b="0">
+              <a:rPr sz="1650" b="0">
                 <a:solidFill>
-                  <a:srgbClr val="28534A"/>
+                  <a:srgbClr val="687572"/>
                 </a:solidFill>
-                <a:latin typeface="Arial"/>
-                <a:ea typeface="Arial"/>
-                <a:cs typeface="Arial"/>
+                <a:latin typeface="DejaVu Sans"/>
+                <a:ea typeface="DejaVu Sans"/>
+                <a:cs typeface="DejaVu Sans"/>
               </a:rPr>
-              <a:t>Time: [Add minutes]     Check: [Add your feedback routine]</a:t>
+              <a:t>Time: [Minutes]</a:t>
             </a:r>
           </a:p>
         </p:txBody>
       </p:sp>
       <p:sp>
         <p:nvSpPr>
-          <p:cNvPr id="11" name="">
-            <a:extLst xmlns:a="http://schemas.openxmlformats.org/drawingml/2006/main">
-              <a:ext uri="{FF2B5EF4-FFF2-40B4-BE49-F238E27FC236}">
-                <a16:creationId xmlns:a16="http://schemas.microsoft.com/office/drawing/2014/main" id="{B18DB167-0B43-4F31-A2F6-EDB43118C9B1}"/>
+          <p:cNvPr id="38" name="">
+            <a:extLst xmlns:a="http://schemas.openxmlformats.org/drawingml/2006/main">
+              <a:ext uri="{FF2B5EF4-FFF2-40B4-BE49-F238E27FC236}">
+                <a16:creationId xmlns:a16="http://schemas.microsoft.com/office/drawing/2014/main" id="{8F6F691E-70D1-4DCC-BACE-A264278664DF}"/>
               </a:ext>
             </a:extLst>
           </p:cNvPr>
@@ -3449,8 +4585,8 @@
         </p:nvSpPr>
         <p:spPr>
           <a:xfrm xmlns:a="http://schemas.openxmlformats.org/drawingml/2006/main">
-            <a:off x="609600" y="6534150"/>
-            <a:ext cx="10972800" cy="209550"/>
+            <a:off x="4286250" y="6191250"/>
+            <a:ext cx="7296150" cy="361950"/>
           </a:xfrm>
           <a:prstGeom xmlns:a="http://schemas.openxmlformats.org/drawingml/2006/main" prst="rect">
             <a:avLst/>
@@ -3467,25 +4603,25 @@
           <a:lstStyle xmlns:a="http://schemas.openxmlformats.org/drawingml/2006/main"/>
           <a:p xmlns:a="http://schemas.openxmlformats.org/drawingml/2006/main">
             <a:pPr>
-              <a:defRPr sz="1050" b="0">
+              <a:defRPr sz="1650" b="0">
                 <a:solidFill>
-                  <a:srgbClr val="62675C"/>
+                  <a:srgbClr val="687572"/>
                 </a:solidFill>
-                <a:latin typeface="Arial"/>
-                <a:ea typeface="Arial"/>
-                <a:cs typeface="Arial"/>
+                <a:latin typeface="DejaVu Sans"/>
+                <a:ea typeface="DejaVu Sans"/>
+                <a:cs typeface="DejaVu Sans"/>
               </a:defRPr>
             </a:pPr>
             <a:r>
-              <a:rPr sz="1050" b="0">
+              <a:rPr sz="1650" b="0">
                 <a:solidFill>
-                  <a:srgbClr val="62675C"/>
+                  <a:srgbClr val="687572"/>
                 </a:solidFill>
-                <a:latin typeface="Arial"/>
-                <a:ea typeface="Arial"/>
-                <a:cs typeface="Arial"/>
+                <a:latin typeface="DejaVu Sans"/>
+                <a:ea typeface="DejaVu Sans"/>
+                <a:cs typeface="DejaVu Sans"/>
               </a:rPr>
-              <a:t>TNT Teaching Tools   Editable classroom template   Source and teacher guidance in speaker notes</a:t>
+              <a:t>Feedback: [Your checking routine]</a:t>
             </a:r>
           </a:p>
         </p:txBody>
@@ -3493,7 +4629,7 @@
     </p:spTree>
     <p:extLst>
       <p:ext uri="{BB962C8B-B14F-4D97-AF65-F5344CB8AC3E}">
-        <p14:creationId xmlns:p14="http://schemas.microsoft.com/office/powerpoint/2010/main" val="1504492817"/>
+        <p14:creationId xmlns:p14="http://schemas.microsoft.com/office/powerpoint/2010/main" val="1817373138"/>
       </p:ext>
     </p:extLst>
   </p:cSld>
